--- a/public/lessons/year-6-maths/summer/week-28/construct-pie-chart-sectors/teaching-powerpoint-v1.pptx
+++ b/public/lessons/year-6-maths/summer/week-28/construct-pie-chart-sectors/teaching-powerpoint-v1.pptx
@@ -2,24 +2,24 @@
 <file path=ppt/presentation.xml><?xml version="1.0" encoding="utf-8"?>
 <p:presentation xmlns:p="http://schemas.openxmlformats.org/presentationml/2006/main">
   <p:sldMasterIdLst>
-    <p:sldMasterId xmlns:r="http://schemas.openxmlformats.org/officeDocument/2006/relationships" id="2147483648" r:id="Rf5f7b33ccdc54efb"/>
+    <p:sldMasterId xmlns:r="http://schemas.openxmlformats.org/officeDocument/2006/relationships" id="2147483648" r:id="R4ff4a17011604c2c"/>
   </p:sldMasterIdLst>
   <p:notesMasterIdLst>
-    <p:notesMasterId xmlns:r="http://schemas.openxmlformats.org/officeDocument/2006/relationships" r:id="R80ba0432ca84447d"/>
+    <p:notesMasterId xmlns:r="http://schemas.openxmlformats.org/officeDocument/2006/relationships" r:id="Ra35003ab751849b5"/>
   </p:notesMasterIdLst>
   <p:sldIdLst>
-    <p:sldId xmlns:r="http://schemas.openxmlformats.org/officeDocument/2006/relationships" id="256" r:id="Rcafb2bb9449c4973"/>
-    <p:sldId xmlns:r="http://schemas.openxmlformats.org/officeDocument/2006/relationships" id="257" r:id="R1d6d6f6197a04df5"/>
-    <p:sldId xmlns:r="http://schemas.openxmlformats.org/officeDocument/2006/relationships" id="258" r:id="R7a0ed68647e645fa"/>
-    <p:sldId xmlns:r="http://schemas.openxmlformats.org/officeDocument/2006/relationships" id="259" r:id="R9c4c06418b274fde"/>
-    <p:sldId xmlns:r="http://schemas.openxmlformats.org/officeDocument/2006/relationships" id="260" r:id="R285e6dfa24fc40c9"/>
-    <p:sldId xmlns:r="http://schemas.openxmlformats.org/officeDocument/2006/relationships" id="261" r:id="R6e9698df4f0f4a34"/>
-    <p:sldId xmlns:r="http://schemas.openxmlformats.org/officeDocument/2006/relationships" id="262" r:id="R2fb4187cc3b64fa7"/>
-    <p:sldId xmlns:r="http://schemas.openxmlformats.org/officeDocument/2006/relationships" id="263" r:id="Rb5fc9355077c4b5b"/>
-    <p:sldId xmlns:r="http://schemas.openxmlformats.org/officeDocument/2006/relationships" id="264" r:id="R46e33906137f4656"/>
-    <p:sldId xmlns:r="http://schemas.openxmlformats.org/officeDocument/2006/relationships" id="265" r:id="R0e2e6ab20a164e00"/>
-    <p:sldId xmlns:r="http://schemas.openxmlformats.org/officeDocument/2006/relationships" id="266" r:id="Rc73d3f76183f4bf6"/>
-    <p:sldId xmlns:r="http://schemas.openxmlformats.org/officeDocument/2006/relationships" id="267" r:id="R131c8d4cd06b4bc8"/>
+    <p:sldId xmlns:r="http://schemas.openxmlformats.org/officeDocument/2006/relationships" id="256" r:id="R22a18e5701f64d9c"/>
+    <p:sldId xmlns:r="http://schemas.openxmlformats.org/officeDocument/2006/relationships" id="257" r:id="Rd956cc271c7f4ee9"/>
+    <p:sldId xmlns:r="http://schemas.openxmlformats.org/officeDocument/2006/relationships" id="258" r:id="R6c47d5f8182d4554"/>
+    <p:sldId xmlns:r="http://schemas.openxmlformats.org/officeDocument/2006/relationships" id="259" r:id="R2ff1d5779a164a09"/>
+    <p:sldId xmlns:r="http://schemas.openxmlformats.org/officeDocument/2006/relationships" id="260" r:id="Rfbd57fe62c984d4a"/>
+    <p:sldId xmlns:r="http://schemas.openxmlformats.org/officeDocument/2006/relationships" id="261" r:id="R229e593f27b7444a"/>
+    <p:sldId xmlns:r="http://schemas.openxmlformats.org/officeDocument/2006/relationships" id="262" r:id="R0b382aa900814435"/>
+    <p:sldId xmlns:r="http://schemas.openxmlformats.org/officeDocument/2006/relationships" id="263" r:id="R8176a18306e14bef"/>
+    <p:sldId xmlns:r="http://schemas.openxmlformats.org/officeDocument/2006/relationships" id="264" r:id="Ra58112b6e5a84cee"/>
+    <p:sldId xmlns:r="http://schemas.openxmlformats.org/officeDocument/2006/relationships" id="265" r:id="Rfae780254e58418b"/>
+    <p:sldId xmlns:r="http://schemas.openxmlformats.org/officeDocument/2006/relationships" id="266" r:id="Ra602e05a7cd148dc"/>
+    <p:sldId xmlns:r="http://schemas.openxmlformats.org/officeDocument/2006/relationships" id="267" r:id="R8d8c1fef0fae41a2"/>
   </p:sldIdLst>
   <p:sldSz cx="12192000" cy="6858000"/>
   <p:notesSz cx="6858000" cy="9144000"/>
@@ -873,7 +873,7 @@
           <a:lstStyle xmlns:a="http://schemas.openxmlformats.org/drawingml/2006/main"/>
           <a:p xmlns:a="http://schemas.openxmlformats.org/drawingml/2006/main">
             <a:r>
-              <a:t>I do. Reveal the question, setup and each calculation stage one click at a time. Pupils watch before copying. Model answer: 90 degrees.</a:t>
+              <a:t>I do. Reveal the question, then reveal each mathematical change one click at a time. Point to the numbers and operation that changed before moving to the next line. Final answer: 90 degrees.</a:t>
             </a:r>
           </a:p>
         </p:txBody>
@@ -1291,7 +1291,7 @@
   </p:cSld>
   <p:clrMap bg1="lt1" tx1="dk1" bg2="lt2" tx2="dk2" accent1="accent1" accent2="accent2" accent3="accent3" accent4="accent4" accent5="accent5" accent6="accent6" hlink="hlink" folHlink="folHlink"/>
   <p:sldLayoutIdLst>
-    <p:sldLayoutId xmlns:r="http://schemas.openxmlformats.org/officeDocument/2006/relationships" id="2147483649" r:id="R75add4948e574326"/>
+    <p:sldLayoutId xmlns:r="http://schemas.openxmlformats.org/officeDocument/2006/relationships" id="2147483649" r:id="R1fc9ad37d9644f88"/>
   </p:sldLayoutIdLst>
   <p:txStyles>
     <p:titleStyle>
@@ -1842,7 +1842,7 @@
           <p:cNvPr id="12" name="">
             <a:extLst xmlns:a="http://schemas.openxmlformats.org/drawingml/2006/main">
               <a:ext uri="{FF2B5EF4-FFF2-40B4-BE49-F238E27FC236}">
-                <a16:creationId xmlns:a16="http://schemas.microsoft.com/office/drawing/2014/main" id="{BE917AAB-7D95-45FC-B3DC-5DA19EDF4A30}"/>
+                <a16:creationId xmlns:a16="http://schemas.microsoft.com/office/drawing/2014/main" id="{46912D91-98C6-4A59-8D6B-F656C864F256}"/>
               </a:ext>
             </a:extLst>
           </p:cNvPr>
@@ -1874,7 +1874,7 @@
           <p:cNvPr id="2" name="">
             <a:extLst xmlns:a="http://schemas.openxmlformats.org/drawingml/2006/main">
               <a:ext uri="{FF2B5EF4-FFF2-40B4-BE49-F238E27FC236}">
-                <a16:creationId xmlns:a16="http://schemas.microsoft.com/office/drawing/2014/main" id="{248E2384-BFAE-47BD-BD5A-7A19A2290D4D}"/>
+                <a16:creationId xmlns:a16="http://schemas.microsoft.com/office/drawing/2014/main" id="{7526B2B7-D963-4CB4-8E5B-EB6CFAAEC72B}"/>
               </a:ext>
             </a:extLst>
           </p:cNvPr>
@@ -1931,7 +1931,7 @@
           <p:cNvPr id="3" name="">
             <a:extLst xmlns:a="http://schemas.openxmlformats.org/drawingml/2006/main">
               <a:ext uri="{FF2B5EF4-FFF2-40B4-BE49-F238E27FC236}">
-                <a16:creationId xmlns:a16="http://schemas.microsoft.com/office/drawing/2014/main" id="{238C9535-C5EC-4B0B-B106-9450A37F9ED7}"/>
+                <a16:creationId xmlns:a16="http://schemas.microsoft.com/office/drawing/2014/main" id="{7CA020A9-AC37-4531-A3EB-2865831B252E}"/>
               </a:ext>
             </a:extLst>
           </p:cNvPr>
@@ -1965,7 +1965,7 @@
           <p:cNvPr id="4" name="">
             <a:extLst xmlns:a="http://schemas.openxmlformats.org/drawingml/2006/main">
               <a:ext uri="{FF2B5EF4-FFF2-40B4-BE49-F238E27FC236}">
-                <a16:creationId xmlns:a16="http://schemas.microsoft.com/office/drawing/2014/main" id="{03D1E3EB-3ACF-4BC1-A291-DF0EFE6AC835}"/>
+                <a16:creationId xmlns:a16="http://schemas.microsoft.com/office/drawing/2014/main" id="{CB18E294-1E2B-4029-857D-A10989CF262E}"/>
               </a:ext>
             </a:extLst>
           </p:cNvPr>
@@ -2022,7 +2022,7 @@
           <p:cNvPr id="5" name="">
             <a:extLst xmlns:a="http://schemas.openxmlformats.org/drawingml/2006/main">
               <a:ext uri="{FF2B5EF4-FFF2-40B4-BE49-F238E27FC236}">
-                <a16:creationId xmlns:a16="http://schemas.microsoft.com/office/drawing/2014/main" id="{8FC1224F-9206-4FFE-B275-41EA88B768A6}"/>
+                <a16:creationId xmlns:a16="http://schemas.microsoft.com/office/drawing/2014/main" id="{CD3FDD89-A701-4E3A-A953-E6F15D1F7DCC}"/>
               </a:ext>
             </a:extLst>
           </p:cNvPr>
@@ -2079,7 +2079,7 @@
           <p:cNvPr id="6" name="">
             <a:extLst xmlns:a="http://schemas.openxmlformats.org/drawingml/2006/main">
               <a:ext uri="{FF2B5EF4-FFF2-40B4-BE49-F238E27FC236}">
-                <a16:creationId xmlns:a16="http://schemas.microsoft.com/office/drawing/2014/main" id="{B327F4FF-0B59-447C-A8F6-28CD259CE787}"/>
+                <a16:creationId xmlns:a16="http://schemas.microsoft.com/office/drawing/2014/main" id="{1D36C61E-D6E8-44ED-9E92-31D7B32DC717}"/>
               </a:ext>
             </a:extLst>
           </p:cNvPr>
@@ -2113,7 +2113,7 @@
           <p:cNvPr id="7" name="">
             <a:extLst xmlns:a="http://schemas.openxmlformats.org/drawingml/2006/main">
               <a:ext uri="{FF2B5EF4-FFF2-40B4-BE49-F238E27FC236}">
-                <a16:creationId xmlns:a16="http://schemas.microsoft.com/office/drawing/2014/main" id="{EEA6D258-6A58-40EB-9068-5004A7337FA4}"/>
+                <a16:creationId xmlns:a16="http://schemas.microsoft.com/office/drawing/2014/main" id="{72E89B76-04E8-47E9-BBEA-FF90C093AB09}"/>
               </a:ext>
             </a:extLst>
           </p:cNvPr>
@@ -2170,7 +2170,7 @@
           <p:cNvPr id="8" name="">
             <a:extLst xmlns:a="http://schemas.openxmlformats.org/drawingml/2006/main">
               <a:ext uri="{FF2B5EF4-FFF2-40B4-BE49-F238E27FC236}">
-                <a16:creationId xmlns:a16="http://schemas.microsoft.com/office/drawing/2014/main" id="{A7201A35-787B-4304-8AEC-E9E59335DB49}"/>
+                <a16:creationId xmlns:a16="http://schemas.microsoft.com/office/drawing/2014/main" id="{C50F37B6-791E-4E0E-9E2F-16489EEEFDEB}"/>
               </a:ext>
             </a:extLst>
           </p:cNvPr>
@@ -2227,7 +2227,7 @@
           <p:cNvPr id="9" name="">
             <a:extLst xmlns:a="http://schemas.openxmlformats.org/drawingml/2006/main">
               <a:ext uri="{FF2B5EF4-FFF2-40B4-BE49-F238E27FC236}">
-                <a16:creationId xmlns:a16="http://schemas.microsoft.com/office/drawing/2014/main" id="{6C1EE3A4-D42B-4E00-8468-228D65B31AD2}"/>
+                <a16:creationId xmlns:a16="http://schemas.microsoft.com/office/drawing/2014/main" id="{8D8C224A-C95A-498C-A756-A19177499D3F}"/>
               </a:ext>
             </a:extLst>
           </p:cNvPr>
@@ -2284,7 +2284,7 @@
           <p:cNvPr id="10" name="">
             <a:extLst xmlns:a="http://schemas.openxmlformats.org/drawingml/2006/main">
               <a:ext uri="{FF2B5EF4-FFF2-40B4-BE49-F238E27FC236}">
-                <a16:creationId xmlns:a16="http://schemas.microsoft.com/office/drawing/2014/main" id="{15C5FE03-D997-4F13-B599-C6E05ED1D5BF}"/>
+                <a16:creationId xmlns:a16="http://schemas.microsoft.com/office/drawing/2014/main" id="{63AB77E5-E86B-4041-BE45-E57EC9D051EF}"/>
               </a:ext>
             </a:extLst>
           </p:cNvPr>
@@ -2341,7 +2341,7 @@
           <p:cNvPr id="11" name="">
             <a:extLst xmlns:a="http://schemas.openxmlformats.org/drawingml/2006/main">
               <a:ext uri="{FF2B5EF4-FFF2-40B4-BE49-F238E27FC236}">
-                <a16:creationId xmlns:a16="http://schemas.microsoft.com/office/drawing/2014/main" id="{32D92011-F8C7-4246-AA6B-7013F6CF7B68}"/>
+                <a16:creationId xmlns:a16="http://schemas.microsoft.com/office/drawing/2014/main" id="{97969D48-7C8E-4304-8A4F-0BFDD0594139}"/>
               </a:ext>
             </a:extLst>
           </p:cNvPr>
@@ -2396,7 +2396,7 @@
     </p:spTree>
     <p:extLst>
       <p:ext uri="{BB962C8B-B14F-4D97-AF65-F5344CB8AC3E}">
-        <p14:creationId xmlns:p14="http://schemas.microsoft.com/office/powerpoint/2010/main" val="1188354381"/>
+        <p14:creationId xmlns:p14="http://schemas.microsoft.com/office/powerpoint/2010/main" val="1113399638"/>
       </p:ext>
     </p:extLst>
   </p:cSld>
@@ -2427,7 +2427,7 @@
           <p:cNvPr id="14" name="">
             <a:extLst xmlns:a="http://schemas.openxmlformats.org/drawingml/2006/main">
               <a:ext uri="{FF2B5EF4-FFF2-40B4-BE49-F238E27FC236}">
-                <a16:creationId xmlns:a16="http://schemas.microsoft.com/office/drawing/2014/main" id="{8EEFBD85-B61A-44FC-88BA-F659A6538548}"/>
+                <a16:creationId xmlns:a16="http://schemas.microsoft.com/office/drawing/2014/main" id="{1F878210-7B35-49F2-9BF4-E71EAB0EC6B5}"/>
               </a:ext>
             </a:extLst>
           </p:cNvPr>
@@ -2459,7 +2459,7 @@
           <p:cNvPr id="2" name="">
             <a:extLst xmlns:a="http://schemas.openxmlformats.org/drawingml/2006/main">
               <a:ext uri="{FF2B5EF4-FFF2-40B4-BE49-F238E27FC236}">
-                <a16:creationId xmlns:a16="http://schemas.microsoft.com/office/drawing/2014/main" id="{6EADC19C-E9C8-4DC4-B192-44C01DA7DFEE}"/>
+                <a16:creationId xmlns:a16="http://schemas.microsoft.com/office/drawing/2014/main" id="{BB63FD27-FC6A-4A7E-B7BC-2653E26A830E}"/>
               </a:ext>
             </a:extLst>
           </p:cNvPr>
@@ -2516,7 +2516,7 @@
           <p:cNvPr id="3" name="">
             <a:extLst xmlns:a="http://schemas.openxmlformats.org/drawingml/2006/main">
               <a:ext uri="{FF2B5EF4-FFF2-40B4-BE49-F238E27FC236}">
-                <a16:creationId xmlns:a16="http://schemas.microsoft.com/office/drawing/2014/main" id="{48FFEDCE-7997-49F9-BCA3-2FA8F37C5D1F}"/>
+                <a16:creationId xmlns:a16="http://schemas.microsoft.com/office/drawing/2014/main" id="{9BE40489-76BF-46E5-8CE0-A71A0187C2CF}"/>
               </a:ext>
             </a:extLst>
           </p:cNvPr>
@@ -2548,7 +2548,7 @@
           <p:cNvPr id="4" name="">
             <a:extLst xmlns:a="http://schemas.openxmlformats.org/drawingml/2006/main">
               <a:ext uri="{FF2B5EF4-FFF2-40B4-BE49-F238E27FC236}">
-                <a16:creationId xmlns:a16="http://schemas.microsoft.com/office/drawing/2014/main" id="{24E8F122-EBE6-405F-8BDE-C17CA3D1D45E}"/>
+                <a16:creationId xmlns:a16="http://schemas.microsoft.com/office/drawing/2014/main" id="{ED13EFE0-4612-4101-BFCD-ED8EC9A7A18C}"/>
               </a:ext>
             </a:extLst>
           </p:cNvPr>
@@ -2605,7 +2605,7 @@
           <p:cNvPr id="5" name="">
             <a:extLst xmlns:a="http://schemas.openxmlformats.org/drawingml/2006/main">
               <a:ext uri="{FF2B5EF4-FFF2-40B4-BE49-F238E27FC236}">
-                <a16:creationId xmlns:a16="http://schemas.microsoft.com/office/drawing/2014/main" id="{C9ECA1DB-3940-4BE8-8DB6-7D22A9A57A1C}"/>
+                <a16:creationId xmlns:a16="http://schemas.microsoft.com/office/drawing/2014/main" id="{8AF06466-5DE0-49D7-992B-747B098CDF2F}"/>
               </a:ext>
             </a:extLst>
           </p:cNvPr>
@@ -2662,7 +2662,7 @@
           <p:cNvPr id="6" name="">
             <a:extLst xmlns:a="http://schemas.openxmlformats.org/drawingml/2006/main">
               <a:ext uri="{FF2B5EF4-FFF2-40B4-BE49-F238E27FC236}">
-                <a16:creationId xmlns:a16="http://schemas.microsoft.com/office/drawing/2014/main" id="{8017829A-B246-49EE-96CB-E54DC7107F38}"/>
+                <a16:creationId xmlns:a16="http://schemas.microsoft.com/office/drawing/2014/main" id="{711ED985-BB85-4E5C-A302-5B7CF7A5A019}"/>
               </a:ext>
             </a:extLst>
           </p:cNvPr>
@@ -2719,7 +2719,7 @@
           <p:cNvPr id="7" name="">
             <a:extLst xmlns:a="http://schemas.openxmlformats.org/drawingml/2006/main">
               <a:ext uri="{FF2B5EF4-FFF2-40B4-BE49-F238E27FC236}">
-                <a16:creationId xmlns:a16="http://schemas.microsoft.com/office/drawing/2014/main" id="{7333DC3B-51B2-447F-B5B6-C8381E5F8DC0}"/>
+                <a16:creationId xmlns:a16="http://schemas.microsoft.com/office/drawing/2014/main" id="{749D007A-526D-45E5-B60D-F5130F300B82}"/>
               </a:ext>
             </a:extLst>
           </p:cNvPr>
@@ -2751,7 +2751,7 @@
           <p:cNvPr id="8" name="">
             <a:extLst xmlns:a="http://schemas.openxmlformats.org/drawingml/2006/main">
               <a:ext uri="{FF2B5EF4-FFF2-40B4-BE49-F238E27FC236}">
-                <a16:creationId xmlns:a16="http://schemas.microsoft.com/office/drawing/2014/main" id="{8B4318D9-6AA2-467E-8504-34AB8BC4B9F9}"/>
+                <a16:creationId xmlns:a16="http://schemas.microsoft.com/office/drawing/2014/main" id="{890AA9CA-04A5-4511-AFD4-874CDCD6EF9A}"/>
               </a:ext>
             </a:extLst>
           </p:cNvPr>
@@ -2808,7 +2808,7 @@
           <p:cNvPr id="9" name="">
             <a:extLst xmlns:a="http://schemas.openxmlformats.org/drawingml/2006/main">
               <a:ext uri="{FF2B5EF4-FFF2-40B4-BE49-F238E27FC236}">
-                <a16:creationId xmlns:a16="http://schemas.microsoft.com/office/drawing/2014/main" id="{D4A605E7-740C-4F7A-B50A-F7D9BCF045DC}"/>
+                <a16:creationId xmlns:a16="http://schemas.microsoft.com/office/drawing/2014/main" id="{22BE8129-01F3-4C1A-B50C-CE1932CB44BB}"/>
               </a:ext>
             </a:extLst>
           </p:cNvPr>
@@ -2865,7 +2865,7 @@
           <p:cNvPr id="10" name="">
             <a:extLst xmlns:a="http://schemas.openxmlformats.org/drawingml/2006/main">
               <a:ext uri="{FF2B5EF4-FFF2-40B4-BE49-F238E27FC236}">
-                <a16:creationId xmlns:a16="http://schemas.microsoft.com/office/drawing/2014/main" id="{1F464C42-D850-4D55-97D9-1228BB8B27DB}"/>
+                <a16:creationId xmlns:a16="http://schemas.microsoft.com/office/drawing/2014/main" id="{B38DBF08-8377-457C-A525-81042FAEDB3E}"/>
               </a:ext>
             </a:extLst>
           </p:cNvPr>
@@ -2922,7 +2922,7 @@
           <p:cNvPr id="11" name="">
             <a:extLst xmlns:a="http://schemas.openxmlformats.org/drawingml/2006/main">
               <a:ext uri="{FF2B5EF4-FFF2-40B4-BE49-F238E27FC236}">
-                <a16:creationId xmlns:a16="http://schemas.microsoft.com/office/drawing/2014/main" id="{73BE93D0-4F21-4CF8-990B-4248948B3B3A}"/>
+                <a16:creationId xmlns:a16="http://schemas.microsoft.com/office/drawing/2014/main" id="{E54A480C-794B-4EC0-8164-9D7DA0FB0FC0}"/>
               </a:ext>
             </a:extLst>
           </p:cNvPr>
@@ -2979,7 +2979,7 @@
           <p:cNvPr id="12" name="">
             <a:extLst xmlns:a="http://schemas.openxmlformats.org/drawingml/2006/main">
               <a:ext uri="{FF2B5EF4-FFF2-40B4-BE49-F238E27FC236}">
-                <a16:creationId xmlns:a16="http://schemas.microsoft.com/office/drawing/2014/main" id="{B73E9CEF-20F5-4D06-B1F2-21A2B5F08BF3}"/>
+                <a16:creationId xmlns:a16="http://schemas.microsoft.com/office/drawing/2014/main" id="{9965DEAC-809B-40FC-825C-75EA153A9E31}"/>
               </a:ext>
             </a:extLst>
           </p:cNvPr>
@@ -3036,7 +3036,7 @@
           <p:cNvPr id="13" name="">
             <a:extLst xmlns:a="http://schemas.openxmlformats.org/drawingml/2006/main">
               <a:ext uri="{FF2B5EF4-FFF2-40B4-BE49-F238E27FC236}">
-                <a16:creationId xmlns:a16="http://schemas.microsoft.com/office/drawing/2014/main" id="{1BB83C5D-022E-42E1-8237-D2240404C9D5}"/>
+                <a16:creationId xmlns:a16="http://schemas.microsoft.com/office/drawing/2014/main" id="{63EF839D-3D90-412E-948F-36956E623052}"/>
               </a:ext>
             </a:extLst>
           </p:cNvPr>
@@ -3091,7 +3091,7 @@
     </p:spTree>
     <p:extLst>
       <p:ext uri="{BB962C8B-B14F-4D97-AF65-F5344CB8AC3E}">
-        <p14:creationId xmlns:p14="http://schemas.microsoft.com/office/powerpoint/2010/main" val="76362717"/>
+        <p14:creationId xmlns:p14="http://schemas.microsoft.com/office/powerpoint/2010/main" val="975776178"/>
       </p:ext>
     </p:extLst>
   </p:cSld>
@@ -3292,7 +3292,7 @@
           <p:cNvPr id="19" name="">
             <a:extLst xmlns:a="http://schemas.openxmlformats.org/drawingml/2006/main">
               <a:ext uri="{FF2B5EF4-FFF2-40B4-BE49-F238E27FC236}">
-                <a16:creationId xmlns:a16="http://schemas.microsoft.com/office/drawing/2014/main" id="{F2A51CC6-ED49-41CD-A2E9-EA215BBAEE44}"/>
+                <a16:creationId xmlns:a16="http://schemas.microsoft.com/office/drawing/2014/main" id="{566AD6C7-B2F7-450D-BD95-83D64658E5EC}"/>
               </a:ext>
             </a:extLst>
           </p:cNvPr>
@@ -3324,7 +3324,7 @@
           <p:cNvPr id="2" name="">
             <a:extLst xmlns:a="http://schemas.openxmlformats.org/drawingml/2006/main">
               <a:ext uri="{FF2B5EF4-FFF2-40B4-BE49-F238E27FC236}">
-                <a16:creationId xmlns:a16="http://schemas.microsoft.com/office/drawing/2014/main" id="{961D6E0B-3DE2-4DFC-A51E-93DCEA8ECFF6}"/>
+                <a16:creationId xmlns:a16="http://schemas.microsoft.com/office/drawing/2014/main" id="{35826692-7156-4CCC-8E41-BFA6B0B0156D}"/>
               </a:ext>
             </a:extLst>
           </p:cNvPr>
@@ -3381,7 +3381,7 @@
           <p:cNvPr id="3" name="">
             <a:extLst xmlns:a="http://schemas.openxmlformats.org/drawingml/2006/main">
               <a:ext uri="{FF2B5EF4-FFF2-40B4-BE49-F238E27FC236}">
-                <a16:creationId xmlns:a16="http://schemas.microsoft.com/office/drawing/2014/main" id="{D9E1FB5A-4C74-458C-8A74-C174931CDC75}"/>
+                <a16:creationId xmlns:a16="http://schemas.microsoft.com/office/drawing/2014/main" id="{F209F387-B166-4923-BEC6-ABD907EFBC31}"/>
               </a:ext>
             </a:extLst>
           </p:cNvPr>
@@ -3413,7 +3413,7 @@
           <p:cNvPr id="4" name="">
             <a:extLst xmlns:a="http://schemas.openxmlformats.org/drawingml/2006/main">
               <a:ext uri="{FF2B5EF4-FFF2-40B4-BE49-F238E27FC236}">
-                <a16:creationId xmlns:a16="http://schemas.microsoft.com/office/drawing/2014/main" id="{4F55E4A1-D4BE-4472-B007-D27D83AD3786}"/>
+                <a16:creationId xmlns:a16="http://schemas.microsoft.com/office/drawing/2014/main" id="{3BA7772B-BE32-48ED-A54A-F21C237B2206}"/>
               </a:ext>
             </a:extLst>
           </p:cNvPr>
@@ -3470,7 +3470,7 @@
           <p:cNvPr id="5" name="">
             <a:extLst xmlns:a="http://schemas.openxmlformats.org/drawingml/2006/main">
               <a:ext uri="{FF2B5EF4-FFF2-40B4-BE49-F238E27FC236}">
-                <a16:creationId xmlns:a16="http://schemas.microsoft.com/office/drawing/2014/main" id="{01D973F5-B447-4F3F-BC67-225D4C0867E4}"/>
+                <a16:creationId xmlns:a16="http://schemas.microsoft.com/office/drawing/2014/main" id="{6845B732-CD9F-40A1-82A7-CEB2E2EDA130}"/>
               </a:ext>
             </a:extLst>
           </p:cNvPr>
@@ -3527,7 +3527,7 @@
           <p:cNvPr id="6" name="">
             <a:extLst xmlns:a="http://schemas.openxmlformats.org/drawingml/2006/main">
               <a:ext uri="{FF2B5EF4-FFF2-40B4-BE49-F238E27FC236}">
-                <a16:creationId xmlns:a16="http://schemas.microsoft.com/office/drawing/2014/main" id="{DEEC3153-8748-4DAF-BB22-A3B9F6BC2F27}"/>
+                <a16:creationId xmlns:a16="http://schemas.microsoft.com/office/drawing/2014/main" id="{D673B9ED-FE24-4CD0-8FB0-B3D6852F60B8}"/>
               </a:ext>
             </a:extLst>
           </p:cNvPr>
@@ -3584,7 +3584,7 @@
           <p:cNvPr id="7" name="">
             <a:extLst xmlns:a="http://schemas.openxmlformats.org/drawingml/2006/main">
               <a:ext uri="{FF2B5EF4-FFF2-40B4-BE49-F238E27FC236}">
-                <a16:creationId xmlns:a16="http://schemas.microsoft.com/office/drawing/2014/main" id="{4B69667E-A72E-45EF-8A9C-F84978B571AD}"/>
+                <a16:creationId xmlns:a16="http://schemas.microsoft.com/office/drawing/2014/main" id="{95668162-652D-44C8-AD9F-ABBDA09310DE}"/>
               </a:ext>
             </a:extLst>
           </p:cNvPr>
@@ -3616,7 +3616,7 @@
           <p:cNvPr id="8" name="">
             <a:extLst xmlns:a="http://schemas.openxmlformats.org/drawingml/2006/main">
               <a:ext uri="{FF2B5EF4-FFF2-40B4-BE49-F238E27FC236}">
-                <a16:creationId xmlns:a16="http://schemas.microsoft.com/office/drawing/2014/main" id="{CE9AB9B5-F899-47C6-967E-7363A7EB0D57}"/>
+                <a16:creationId xmlns:a16="http://schemas.microsoft.com/office/drawing/2014/main" id="{712DFE6C-6C28-4056-9C0B-0C6DA7784E74}"/>
               </a:ext>
             </a:extLst>
           </p:cNvPr>
@@ -3673,7 +3673,7 @@
           <p:cNvPr id="9" name="">
             <a:extLst xmlns:a="http://schemas.openxmlformats.org/drawingml/2006/main">
               <a:ext uri="{FF2B5EF4-FFF2-40B4-BE49-F238E27FC236}">
-                <a16:creationId xmlns:a16="http://schemas.microsoft.com/office/drawing/2014/main" id="{6DD961B9-0339-4755-8FAE-502C811A1DBC}"/>
+                <a16:creationId xmlns:a16="http://schemas.microsoft.com/office/drawing/2014/main" id="{3FB42759-05C2-4CC7-9380-ABB58858D5A4}"/>
               </a:ext>
             </a:extLst>
           </p:cNvPr>
@@ -3730,7 +3730,7 @@
           <p:cNvPr id="10" name="">
             <a:extLst xmlns:a="http://schemas.openxmlformats.org/drawingml/2006/main">
               <a:ext uri="{FF2B5EF4-FFF2-40B4-BE49-F238E27FC236}">
-                <a16:creationId xmlns:a16="http://schemas.microsoft.com/office/drawing/2014/main" id="{77603414-ED91-496A-BC78-E45BEF9D4127}"/>
+                <a16:creationId xmlns:a16="http://schemas.microsoft.com/office/drawing/2014/main" id="{FFC8988F-87FC-494F-8C58-540E82D8BB88}"/>
               </a:ext>
             </a:extLst>
           </p:cNvPr>
@@ -3787,7 +3787,7 @@
           <p:cNvPr id="11" name="">
             <a:extLst xmlns:a="http://schemas.openxmlformats.org/drawingml/2006/main">
               <a:ext uri="{FF2B5EF4-FFF2-40B4-BE49-F238E27FC236}">
-                <a16:creationId xmlns:a16="http://schemas.microsoft.com/office/drawing/2014/main" id="{5066C42E-1187-47B9-9F3A-82F37D37A7DA}"/>
+                <a16:creationId xmlns:a16="http://schemas.microsoft.com/office/drawing/2014/main" id="{96CE7D25-E397-44D9-8923-F15238FD07AD}"/>
               </a:ext>
             </a:extLst>
           </p:cNvPr>
@@ -3821,7 +3821,7 @@
           <p:cNvPr id="12" name="">
             <a:extLst xmlns:a="http://schemas.openxmlformats.org/drawingml/2006/main">
               <a:ext uri="{FF2B5EF4-FFF2-40B4-BE49-F238E27FC236}">
-                <a16:creationId xmlns:a16="http://schemas.microsoft.com/office/drawing/2014/main" id="{F97DCD87-71BE-4BBA-9D38-51A1FF57BDD7}"/>
+                <a16:creationId xmlns:a16="http://schemas.microsoft.com/office/drawing/2014/main" id="{228C955C-9F2F-4DF8-B4BB-17C9DBCBCB1E}"/>
               </a:ext>
             </a:extLst>
           </p:cNvPr>
@@ -3878,7 +3878,7 @@
           <p:cNvPr id="13" name="">
             <a:extLst xmlns:a="http://schemas.openxmlformats.org/drawingml/2006/main">
               <a:ext uri="{FF2B5EF4-FFF2-40B4-BE49-F238E27FC236}">
-                <a16:creationId xmlns:a16="http://schemas.microsoft.com/office/drawing/2014/main" id="{83F8707E-18AA-4C39-A5A2-72EC3E295D06}"/>
+                <a16:creationId xmlns:a16="http://schemas.microsoft.com/office/drawing/2014/main" id="{67B4497E-3218-4A18-B453-2A294F1AE630}"/>
               </a:ext>
             </a:extLst>
           </p:cNvPr>
@@ -3935,7 +3935,7 @@
           <p:cNvPr id="14" name="">
             <a:extLst xmlns:a="http://schemas.openxmlformats.org/drawingml/2006/main">
               <a:ext uri="{FF2B5EF4-FFF2-40B4-BE49-F238E27FC236}">
-                <a16:creationId xmlns:a16="http://schemas.microsoft.com/office/drawing/2014/main" id="{75DB4B8E-6BC0-4645-93DC-566F4A09F2A1}"/>
+                <a16:creationId xmlns:a16="http://schemas.microsoft.com/office/drawing/2014/main" id="{6E33B30D-51F1-4924-B5DA-878AFDE02DAC}"/>
               </a:ext>
             </a:extLst>
           </p:cNvPr>
@@ -3992,7 +3992,7 @@
           <p:cNvPr id="15" name="">
             <a:extLst xmlns:a="http://schemas.openxmlformats.org/drawingml/2006/main">
               <a:ext uri="{FF2B5EF4-FFF2-40B4-BE49-F238E27FC236}">
-                <a16:creationId xmlns:a16="http://schemas.microsoft.com/office/drawing/2014/main" id="{8D62364F-C415-42DD-8833-A7115062E29E}"/>
+                <a16:creationId xmlns:a16="http://schemas.microsoft.com/office/drawing/2014/main" id="{A9D6AC19-032E-4FBD-AFD4-08EDB23B3F57}"/>
               </a:ext>
             </a:extLst>
           </p:cNvPr>
@@ -4026,7 +4026,7 @@
           <p:cNvPr id="16" name="">
             <a:extLst xmlns:a="http://schemas.openxmlformats.org/drawingml/2006/main">
               <a:ext uri="{FF2B5EF4-FFF2-40B4-BE49-F238E27FC236}">
-                <a16:creationId xmlns:a16="http://schemas.microsoft.com/office/drawing/2014/main" id="{3944BA6D-740D-497A-B9EB-C707F28B534D}"/>
+                <a16:creationId xmlns:a16="http://schemas.microsoft.com/office/drawing/2014/main" id="{00C892F8-E99F-4E1A-8F42-FA5A60A9B935}"/>
               </a:ext>
             </a:extLst>
           </p:cNvPr>
@@ -4083,7 +4083,7 @@
           <p:cNvPr id="17" name="">
             <a:extLst xmlns:a="http://schemas.openxmlformats.org/drawingml/2006/main">
               <a:ext uri="{FF2B5EF4-FFF2-40B4-BE49-F238E27FC236}">
-                <a16:creationId xmlns:a16="http://schemas.microsoft.com/office/drawing/2014/main" id="{C19E85BA-7535-48DC-833A-56F35E67599C}"/>
+                <a16:creationId xmlns:a16="http://schemas.microsoft.com/office/drawing/2014/main" id="{F3C5FC87-58F5-40D9-B294-835E9B6F0073}"/>
               </a:ext>
             </a:extLst>
           </p:cNvPr>
@@ -4140,7 +4140,7 @@
           <p:cNvPr id="18" name="">
             <a:extLst xmlns:a="http://schemas.openxmlformats.org/drawingml/2006/main">
               <a:ext uri="{FF2B5EF4-FFF2-40B4-BE49-F238E27FC236}">
-                <a16:creationId xmlns:a16="http://schemas.microsoft.com/office/drawing/2014/main" id="{A583DD50-8300-41A2-9393-A54E165E0BC1}"/>
+                <a16:creationId xmlns:a16="http://schemas.microsoft.com/office/drawing/2014/main" id="{62CB3D38-26D0-4481-9D8F-9A2A0B460C0E}"/>
               </a:ext>
             </a:extLst>
           </p:cNvPr>
@@ -4195,7 +4195,7 @@
     </p:spTree>
     <p:extLst>
       <p:ext uri="{BB962C8B-B14F-4D97-AF65-F5344CB8AC3E}">
-        <p14:creationId xmlns:p14="http://schemas.microsoft.com/office/powerpoint/2010/main" val="2139637371"/>
+        <p14:creationId xmlns:p14="http://schemas.microsoft.com/office/powerpoint/2010/main" val="333372751"/>
       </p:ext>
     </p:extLst>
   </p:cSld>
@@ -4350,7 +4350,7 @@
           <p:cNvPr id="23" name="">
             <a:extLst xmlns:a="http://schemas.openxmlformats.org/drawingml/2006/main">
               <a:ext uri="{FF2B5EF4-FFF2-40B4-BE49-F238E27FC236}">
-                <a16:creationId xmlns:a16="http://schemas.microsoft.com/office/drawing/2014/main" id="{464C8FE3-377A-4B26-B8FA-E4A8BD4E052E}"/>
+                <a16:creationId xmlns:a16="http://schemas.microsoft.com/office/drawing/2014/main" id="{321F696F-624D-44D9-88FE-20FE78AF3554}"/>
               </a:ext>
             </a:extLst>
           </p:cNvPr>
@@ -4382,7 +4382,7 @@
           <p:cNvPr id="2" name="">
             <a:extLst xmlns:a="http://schemas.openxmlformats.org/drawingml/2006/main">
               <a:ext uri="{FF2B5EF4-FFF2-40B4-BE49-F238E27FC236}">
-                <a16:creationId xmlns:a16="http://schemas.microsoft.com/office/drawing/2014/main" id="{E3896DE7-5C88-4965-9F5B-A8014D5CF237}"/>
+                <a16:creationId xmlns:a16="http://schemas.microsoft.com/office/drawing/2014/main" id="{1AFC9AFA-C27B-4FA1-88C4-CF75F0BFC205}"/>
               </a:ext>
             </a:extLst>
           </p:cNvPr>
@@ -4439,7 +4439,7 @@
           <p:cNvPr id="3" name="">
             <a:extLst xmlns:a="http://schemas.openxmlformats.org/drawingml/2006/main">
               <a:ext uri="{FF2B5EF4-FFF2-40B4-BE49-F238E27FC236}">
-                <a16:creationId xmlns:a16="http://schemas.microsoft.com/office/drawing/2014/main" id="{81D116F4-07DB-47DB-926A-E97F1F306730}"/>
+                <a16:creationId xmlns:a16="http://schemas.microsoft.com/office/drawing/2014/main" id="{5AEC4100-AE01-476A-9651-9C584E4C3C97}"/>
               </a:ext>
             </a:extLst>
           </p:cNvPr>
@@ -4471,7 +4471,7 @@
           <p:cNvPr id="4" name="">
             <a:extLst xmlns:a="http://schemas.openxmlformats.org/drawingml/2006/main">
               <a:ext uri="{FF2B5EF4-FFF2-40B4-BE49-F238E27FC236}">
-                <a16:creationId xmlns:a16="http://schemas.microsoft.com/office/drawing/2014/main" id="{A27BF19E-8C54-4F79-9210-97B5318D7A16}"/>
+                <a16:creationId xmlns:a16="http://schemas.microsoft.com/office/drawing/2014/main" id="{ADAE1BC5-B2E7-428F-A7BA-BB0A635D7ABF}"/>
               </a:ext>
             </a:extLst>
           </p:cNvPr>
@@ -4528,7 +4528,7 @@
           <p:cNvPr id="5" name="">
             <a:extLst xmlns:a="http://schemas.openxmlformats.org/drawingml/2006/main">
               <a:ext uri="{FF2B5EF4-FFF2-40B4-BE49-F238E27FC236}">
-                <a16:creationId xmlns:a16="http://schemas.microsoft.com/office/drawing/2014/main" id="{8511D356-5DA5-4712-80E7-5E0D71A41CF0}"/>
+                <a16:creationId xmlns:a16="http://schemas.microsoft.com/office/drawing/2014/main" id="{4461F988-567F-4E87-AC9B-922AF2BF099E}"/>
               </a:ext>
             </a:extLst>
           </p:cNvPr>
@@ -4585,7 +4585,7 @@
           <p:cNvPr id="6" name="">
             <a:extLst xmlns:a="http://schemas.openxmlformats.org/drawingml/2006/main">
               <a:ext uri="{FF2B5EF4-FFF2-40B4-BE49-F238E27FC236}">
-                <a16:creationId xmlns:a16="http://schemas.microsoft.com/office/drawing/2014/main" id="{F853A422-06F1-4F37-BA75-BDE95365B322}"/>
+                <a16:creationId xmlns:a16="http://schemas.microsoft.com/office/drawing/2014/main" id="{7A1C2915-4CA0-4E61-BE07-573F425FDBA4}"/>
               </a:ext>
             </a:extLst>
           </p:cNvPr>
@@ -4642,7 +4642,7 @@
           <p:cNvPr id="7" name="">
             <a:extLst xmlns:a="http://schemas.openxmlformats.org/drawingml/2006/main">
               <a:ext uri="{FF2B5EF4-FFF2-40B4-BE49-F238E27FC236}">
-                <a16:creationId xmlns:a16="http://schemas.microsoft.com/office/drawing/2014/main" id="{5FFE5A54-18A0-4207-81D2-BF4FEB8FF1FE}"/>
+                <a16:creationId xmlns:a16="http://schemas.microsoft.com/office/drawing/2014/main" id="{1CB1B3C2-8171-49A0-81A5-B4CAC42378CB}"/>
               </a:ext>
             </a:extLst>
           </p:cNvPr>
@@ -4674,7 +4674,7 @@
           <p:cNvPr id="8" name="">
             <a:extLst xmlns:a="http://schemas.openxmlformats.org/drawingml/2006/main">
               <a:ext uri="{FF2B5EF4-FFF2-40B4-BE49-F238E27FC236}">
-                <a16:creationId xmlns:a16="http://schemas.microsoft.com/office/drawing/2014/main" id="{685456FE-E30A-427A-A735-9EC4EA8362F3}"/>
+                <a16:creationId xmlns:a16="http://schemas.microsoft.com/office/drawing/2014/main" id="{83B0C1BA-F040-4EF5-BCCA-E9E40E7AF578}"/>
               </a:ext>
             </a:extLst>
           </p:cNvPr>
@@ -4731,7 +4731,7 @@
           <p:cNvPr id="9" name="">
             <a:extLst xmlns:a="http://schemas.openxmlformats.org/drawingml/2006/main">
               <a:ext uri="{FF2B5EF4-FFF2-40B4-BE49-F238E27FC236}">
-                <a16:creationId xmlns:a16="http://schemas.microsoft.com/office/drawing/2014/main" id="{1CBE4A29-3D46-4ADD-A144-CB74BF18C17A}"/>
+                <a16:creationId xmlns:a16="http://schemas.microsoft.com/office/drawing/2014/main" id="{ACC72B44-0D6F-48A6-8077-7EB12805E181}"/>
               </a:ext>
             </a:extLst>
           </p:cNvPr>
@@ -4788,7 +4788,7 @@
           <p:cNvPr id="10" name="">
             <a:extLst xmlns:a="http://schemas.openxmlformats.org/drawingml/2006/main">
               <a:ext uri="{FF2B5EF4-FFF2-40B4-BE49-F238E27FC236}">
-                <a16:creationId xmlns:a16="http://schemas.microsoft.com/office/drawing/2014/main" id="{5E7E1323-DA65-4F0E-8F5A-FEE40D661EB6}"/>
+                <a16:creationId xmlns:a16="http://schemas.microsoft.com/office/drawing/2014/main" id="{D869F618-C977-44C8-824B-5706509863FD}"/>
               </a:ext>
             </a:extLst>
           </p:cNvPr>
@@ -4822,7 +4822,7 @@
           <p:cNvPr id="11" name="">
             <a:extLst xmlns:a="http://schemas.openxmlformats.org/drawingml/2006/main">
               <a:ext uri="{FF2B5EF4-FFF2-40B4-BE49-F238E27FC236}">
-                <a16:creationId xmlns:a16="http://schemas.microsoft.com/office/drawing/2014/main" id="{065D8C55-627F-4CFD-AC9C-468959ADC917}"/>
+                <a16:creationId xmlns:a16="http://schemas.microsoft.com/office/drawing/2014/main" id="{D2A8BA9D-627F-44A7-A5E9-6EFA24B55CB4}"/>
               </a:ext>
             </a:extLst>
           </p:cNvPr>
@@ -4854,7 +4854,7 @@
           <p:cNvPr id="12" name="">
             <a:extLst xmlns:a="http://schemas.openxmlformats.org/drawingml/2006/main">
               <a:ext uri="{FF2B5EF4-FFF2-40B4-BE49-F238E27FC236}">
-                <a16:creationId xmlns:a16="http://schemas.microsoft.com/office/drawing/2014/main" id="{AC60FC0F-8C38-43BC-B5D5-5DAD055AD5C5}"/>
+                <a16:creationId xmlns:a16="http://schemas.microsoft.com/office/drawing/2014/main" id="{467014F7-5A92-4F0B-AF2E-D0505E59067D}"/>
               </a:ext>
             </a:extLst>
           </p:cNvPr>
@@ -4911,7 +4911,7 @@
           <p:cNvPr id="13" name="">
             <a:extLst xmlns:a="http://schemas.openxmlformats.org/drawingml/2006/main">
               <a:ext uri="{FF2B5EF4-FFF2-40B4-BE49-F238E27FC236}">
-                <a16:creationId xmlns:a16="http://schemas.microsoft.com/office/drawing/2014/main" id="{9329338E-619E-4BC3-939C-A3D2F9E1141A}"/>
+                <a16:creationId xmlns:a16="http://schemas.microsoft.com/office/drawing/2014/main" id="{BE5F139F-BFA8-4B23-84E8-7092092DE81C}"/>
               </a:ext>
             </a:extLst>
           </p:cNvPr>
@@ -4968,7 +4968,7 @@
           <p:cNvPr id="14" name="">
             <a:extLst xmlns:a="http://schemas.openxmlformats.org/drawingml/2006/main">
               <a:ext uri="{FF2B5EF4-FFF2-40B4-BE49-F238E27FC236}">
-                <a16:creationId xmlns:a16="http://schemas.microsoft.com/office/drawing/2014/main" id="{6E9F706D-D932-4BDB-994A-844924356A12}"/>
+                <a16:creationId xmlns:a16="http://schemas.microsoft.com/office/drawing/2014/main" id="{E4D5E956-2DE6-444A-99BB-7E5BAEBEDA3E}"/>
               </a:ext>
             </a:extLst>
           </p:cNvPr>
@@ -5002,7 +5002,7 @@
           <p:cNvPr id="15" name="">
             <a:extLst xmlns:a="http://schemas.openxmlformats.org/drawingml/2006/main">
               <a:ext uri="{FF2B5EF4-FFF2-40B4-BE49-F238E27FC236}">
-                <a16:creationId xmlns:a16="http://schemas.microsoft.com/office/drawing/2014/main" id="{B1939BC7-A9AF-484B-AAFA-B95CE984F50B}"/>
+                <a16:creationId xmlns:a16="http://schemas.microsoft.com/office/drawing/2014/main" id="{C403B2C7-006D-4BB2-8957-814F2F3E38C1}"/>
               </a:ext>
             </a:extLst>
           </p:cNvPr>
@@ -5034,7 +5034,7 @@
           <p:cNvPr id="16" name="">
             <a:extLst xmlns:a="http://schemas.openxmlformats.org/drawingml/2006/main">
               <a:ext uri="{FF2B5EF4-FFF2-40B4-BE49-F238E27FC236}">
-                <a16:creationId xmlns:a16="http://schemas.microsoft.com/office/drawing/2014/main" id="{13E56AA8-9C90-4D23-9D2C-B538D18D1666}"/>
+                <a16:creationId xmlns:a16="http://schemas.microsoft.com/office/drawing/2014/main" id="{727C11AF-EAE6-4B1C-B801-2712758785DA}"/>
               </a:ext>
             </a:extLst>
           </p:cNvPr>
@@ -5091,7 +5091,7 @@
           <p:cNvPr id="17" name="">
             <a:extLst xmlns:a="http://schemas.openxmlformats.org/drawingml/2006/main">
               <a:ext uri="{FF2B5EF4-FFF2-40B4-BE49-F238E27FC236}">
-                <a16:creationId xmlns:a16="http://schemas.microsoft.com/office/drawing/2014/main" id="{EECA0099-8802-4C69-9E27-085EF9C25790}"/>
+                <a16:creationId xmlns:a16="http://schemas.microsoft.com/office/drawing/2014/main" id="{25A66DC4-03E2-4F51-ABD5-56D8ED22A6A3}"/>
               </a:ext>
             </a:extLst>
           </p:cNvPr>
@@ -5148,7 +5148,7 @@
           <p:cNvPr id="18" name="">
             <a:extLst xmlns:a="http://schemas.openxmlformats.org/drawingml/2006/main">
               <a:ext uri="{FF2B5EF4-FFF2-40B4-BE49-F238E27FC236}">
-                <a16:creationId xmlns:a16="http://schemas.microsoft.com/office/drawing/2014/main" id="{42C1ED66-8947-4338-80F9-EAC0FAC48CE0}"/>
+                <a16:creationId xmlns:a16="http://schemas.microsoft.com/office/drawing/2014/main" id="{0B3647AC-9C25-4F85-A428-EFF87AEDEB21}"/>
               </a:ext>
             </a:extLst>
           </p:cNvPr>
@@ -5182,7 +5182,7 @@
           <p:cNvPr id="19" name="">
             <a:extLst xmlns:a="http://schemas.openxmlformats.org/drawingml/2006/main">
               <a:ext uri="{FF2B5EF4-FFF2-40B4-BE49-F238E27FC236}">
-                <a16:creationId xmlns:a16="http://schemas.microsoft.com/office/drawing/2014/main" id="{166FF63B-6DBC-4A50-BB79-120D1021D942}"/>
+                <a16:creationId xmlns:a16="http://schemas.microsoft.com/office/drawing/2014/main" id="{758D068A-81F5-46A8-ACDF-365255CF4671}"/>
               </a:ext>
             </a:extLst>
           </p:cNvPr>
@@ -5214,7 +5214,7 @@
           <p:cNvPr id="20" name="">
             <a:extLst xmlns:a="http://schemas.openxmlformats.org/drawingml/2006/main">
               <a:ext uri="{FF2B5EF4-FFF2-40B4-BE49-F238E27FC236}">
-                <a16:creationId xmlns:a16="http://schemas.microsoft.com/office/drawing/2014/main" id="{E472BD49-4C3A-4036-8EFB-EA2EC7FD8410}"/>
+                <a16:creationId xmlns:a16="http://schemas.microsoft.com/office/drawing/2014/main" id="{7205EB79-9A43-491F-9449-A0FA88DBF37F}"/>
               </a:ext>
             </a:extLst>
           </p:cNvPr>
@@ -5271,7 +5271,7 @@
           <p:cNvPr id="21" name="">
             <a:extLst xmlns:a="http://schemas.openxmlformats.org/drawingml/2006/main">
               <a:ext uri="{FF2B5EF4-FFF2-40B4-BE49-F238E27FC236}">
-                <a16:creationId xmlns:a16="http://schemas.microsoft.com/office/drawing/2014/main" id="{7FF53299-9D25-49CC-A71E-7407BDF8343D}"/>
+                <a16:creationId xmlns:a16="http://schemas.microsoft.com/office/drawing/2014/main" id="{096AD096-44C2-440E-87F3-BA630E31934F}"/>
               </a:ext>
             </a:extLst>
           </p:cNvPr>
@@ -5328,7 +5328,7 @@
           <p:cNvPr id="22" name="">
             <a:extLst xmlns:a="http://schemas.openxmlformats.org/drawingml/2006/main">
               <a:ext uri="{FF2B5EF4-FFF2-40B4-BE49-F238E27FC236}">
-                <a16:creationId xmlns:a16="http://schemas.microsoft.com/office/drawing/2014/main" id="{C923FBDE-24B9-4CBA-B7BD-17EFDAAE8D13}"/>
+                <a16:creationId xmlns:a16="http://schemas.microsoft.com/office/drawing/2014/main" id="{A6CA0CB8-6A96-4CBF-A3F5-41CD9F663C03}"/>
               </a:ext>
             </a:extLst>
           </p:cNvPr>
@@ -5383,7 +5383,7 @@
     </p:spTree>
     <p:extLst>
       <p:ext uri="{BB962C8B-B14F-4D97-AF65-F5344CB8AC3E}">
-        <p14:creationId xmlns:p14="http://schemas.microsoft.com/office/powerpoint/2010/main" val="1757879078"/>
+        <p14:creationId xmlns:p14="http://schemas.microsoft.com/office/powerpoint/2010/main" val="1470228475"/>
       </p:ext>
     </p:extLst>
   </p:cSld>
@@ -5584,7 +5584,7 @@
           <p:cNvPr id="23" name="">
             <a:extLst xmlns:a="http://schemas.openxmlformats.org/drawingml/2006/main">
               <a:ext uri="{FF2B5EF4-FFF2-40B4-BE49-F238E27FC236}">
-                <a16:creationId xmlns:a16="http://schemas.microsoft.com/office/drawing/2014/main" id="{48EE7EEC-5FD1-4F60-B2D2-674ABA3497CB}"/>
+                <a16:creationId xmlns:a16="http://schemas.microsoft.com/office/drawing/2014/main" id="{7D803E95-E1D0-4AA4-8CB8-AF8B864F2D47}"/>
               </a:ext>
             </a:extLst>
           </p:cNvPr>
@@ -5616,7 +5616,7 @@
           <p:cNvPr id="2" name="">
             <a:extLst xmlns:a="http://schemas.openxmlformats.org/drawingml/2006/main">
               <a:ext uri="{FF2B5EF4-FFF2-40B4-BE49-F238E27FC236}">
-                <a16:creationId xmlns:a16="http://schemas.microsoft.com/office/drawing/2014/main" id="{7C5F69A2-2D26-4994-87B3-981ABF97B35A}"/>
+                <a16:creationId xmlns:a16="http://schemas.microsoft.com/office/drawing/2014/main" id="{6609E8F7-87EB-4E63-A0D4-61218D946F13}"/>
               </a:ext>
             </a:extLst>
           </p:cNvPr>
@@ -5673,7 +5673,7 @@
           <p:cNvPr id="3" name="">
             <a:extLst xmlns:a="http://schemas.openxmlformats.org/drawingml/2006/main">
               <a:ext uri="{FF2B5EF4-FFF2-40B4-BE49-F238E27FC236}">
-                <a16:creationId xmlns:a16="http://schemas.microsoft.com/office/drawing/2014/main" id="{53232BB8-5066-4B41-9917-BDB30306D32B}"/>
+                <a16:creationId xmlns:a16="http://schemas.microsoft.com/office/drawing/2014/main" id="{6CC21862-090B-4EF8-B8AC-285398B233B2}"/>
               </a:ext>
             </a:extLst>
           </p:cNvPr>
@@ -5705,7 +5705,7 @@
           <p:cNvPr id="4" name="">
             <a:extLst xmlns:a="http://schemas.openxmlformats.org/drawingml/2006/main">
               <a:ext uri="{FF2B5EF4-FFF2-40B4-BE49-F238E27FC236}">
-                <a16:creationId xmlns:a16="http://schemas.microsoft.com/office/drawing/2014/main" id="{33EC283C-2E40-4AD8-9756-8DA0AA9E026A}"/>
+                <a16:creationId xmlns:a16="http://schemas.microsoft.com/office/drawing/2014/main" id="{6C1C7B83-BE67-4C5E-A1A3-59F27C24F8BB}"/>
               </a:ext>
             </a:extLst>
           </p:cNvPr>
@@ -5762,7 +5762,7 @@
           <p:cNvPr id="5" name="">
             <a:extLst xmlns:a="http://schemas.openxmlformats.org/drawingml/2006/main">
               <a:ext uri="{FF2B5EF4-FFF2-40B4-BE49-F238E27FC236}">
-                <a16:creationId xmlns:a16="http://schemas.microsoft.com/office/drawing/2014/main" id="{9EA3E149-76B7-43E4-9F2A-30EA9D8B9A92}"/>
+                <a16:creationId xmlns:a16="http://schemas.microsoft.com/office/drawing/2014/main" id="{E2F13746-BCCD-4B1F-8270-7AD057D67B57}"/>
               </a:ext>
             </a:extLst>
           </p:cNvPr>
@@ -5819,7 +5819,7 @@
           <p:cNvPr id="6" name="">
             <a:extLst xmlns:a="http://schemas.openxmlformats.org/drawingml/2006/main">
               <a:ext uri="{FF2B5EF4-FFF2-40B4-BE49-F238E27FC236}">
-                <a16:creationId xmlns:a16="http://schemas.microsoft.com/office/drawing/2014/main" id="{38AAFFFF-A20E-421D-9E02-9FDBA9966AEE}"/>
+                <a16:creationId xmlns:a16="http://schemas.microsoft.com/office/drawing/2014/main" id="{7ABD60BA-C50B-4EF1-9693-3460CF79B4ED}"/>
               </a:ext>
             </a:extLst>
           </p:cNvPr>
@@ -5876,7 +5876,7 @@
           <p:cNvPr id="7" name="">
             <a:extLst xmlns:a="http://schemas.openxmlformats.org/drawingml/2006/main">
               <a:ext uri="{FF2B5EF4-FFF2-40B4-BE49-F238E27FC236}">
-                <a16:creationId xmlns:a16="http://schemas.microsoft.com/office/drawing/2014/main" id="{61892E27-6573-401F-96D0-BA7CCB732C6A}"/>
+                <a16:creationId xmlns:a16="http://schemas.microsoft.com/office/drawing/2014/main" id="{ECDB1B21-8309-4EF0-AE62-55B451082C4A}"/>
               </a:ext>
             </a:extLst>
           </p:cNvPr>
@@ -5908,7 +5908,7 @@
           <p:cNvPr id="8" name="">
             <a:extLst xmlns:a="http://schemas.openxmlformats.org/drawingml/2006/main">
               <a:ext uri="{FF2B5EF4-FFF2-40B4-BE49-F238E27FC236}">
-                <a16:creationId xmlns:a16="http://schemas.microsoft.com/office/drawing/2014/main" id="{C15B10CB-3D15-41A8-84E2-AA510188B573}"/>
+                <a16:creationId xmlns:a16="http://schemas.microsoft.com/office/drawing/2014/main" id="{02654379-FC73-46DF-923B-302A0A8E589B}"/>
               </a:ext>
             </a:extLst>
           </p:cNvPr>
@@ -5965,7 +5965,7 @@
           <p:cNvPr id="9" name="">
             <a:extLst xmlns:a="http://schemas.openxmlformats.org/drawingml/2006/main">
               <a:ext uri="{FF2B5EF4-FFF2-40B4-BE49-F238E27FC236}">
-                <a16:creationId xmlns:a16="http://schemas.microsoft.com/office/drawing/2014/main" id="{F4862494-36E4-4E8A-BE08-B8961EE11F91}"/>
+                <a16:creationId xmlns:a16="http://schemas.microsoft.com/office/drawing/2014/main" id="{5D4E1AD0-F56F-4188-BEEB-1F424B95613B}"/>
               </a:ext>
             </a:extLst>
           </p:cNvPr>
@@ -6022,7 +6022,7 @@
           <p:cNvPr id="10" name="">
             <a:extLst xmlns:a="http://schemas.openxmlformats.org/drawingml/2006/main">
               <a:ext uri="{FF2B5EF4-FFF2-40B4-BE49-F238E27FC236}">
-                <a16:creationId xmlns:a16="http://schemas.microsoft.com/office/drawing/2014/main" id="{20F2B6AB-4A38-4859-A34F-9701D0103D2B}"/>
+                <a16:creationId xmlns:a16="http://schemas.microsoft.com/office/drawing/2014/main" id="{3BC68E17-6AB6-4E47-B9AD-120366EF2CE6}"/>
               </a:ext>
             </a:extLst>
           </p:cNvPr>
@@ -6056,7 +6056,7 @@
           <p:cNvPr id="11" name="">
             <a:extLst xmlns:a="http://schemas.openxmlformats.org/drawingml/2006/main">
               <a:ext uri="{FF2B5EF4-FFF2-40B4-BE49-F238E27FC236}">
-                <a16:creationId xmlns:a16="http://schemas.microsoft.com/office/drawing/2014/main" id="{35ED3DF8-8D43-435D-B505-705552F1D52E}"/>
+                <a16:creationId xmlns:a16="http://schemas.microsoft.com/office/drawing/2014/main" id="{13D2505A-56F3-4AFB-BB7F-755D511C4800}"/>
               </a:ext>
             </a:extLst>
           </p:cNvPr>
@@ -6088,7 +6088,7 @@
           <p:cNvPr id="12" name="">
             <a:extLst xmlns:a="http://schemas.openxmlformats.org/drawingml/2006/main">
               <a:ext uri="{FF2B5EF4-FFF2-40B4-BE49-F238E27FC236}">
-                <a16:creationId xmlns:a16="http://schemas.microsoft.com/office/drawing/2014/main" id="{D7DAE704-1065-46AD-84DA-9F01C95DFC29}"/>
+                <a16:creationId xmlns:a16="http://schemas.microsoft.com/office/drawing/2014/main" id="{03447B72-541D-4AD8-9BBC-B682795B3819}"/>
               </a:ext>
             </a:extLst>
           </p:cNvPr>
@@ -6145,7 +6145,7 @@
           <p:cNvPr id="13" name="">
             <a:extLst xmlns:a="http://schemas.openxmlformats.org/drawingml/2006/main">
               <a:ext uri="{FF2B5EF4-FFF2-40B4-BE49-F238E27FC236}">
-                <a16:creationId xmlns:a16="http://schemas.microsoft.com/office/drawing/2014/main" id="{E88D32F1-5931-4968-9C7E-A78D10FDDE6D}"/>
+                <a16:creationId xmlns:a16="http://schemas.microsoft.com/office/drawing/2014/main" id="{D02EBE0D-6202-4947-8559-CFD0E5EAE9C6}"/>
               </a:ext>
             </a:extLst>
           </p:cNvPr>
@@ -6202,7 +6202,7 @@
           <p:cNvPr id="14" name="">
             <a:extLst xmlns:a="http://schemas.openxmlformats.org/drawingml/2006/main">
               <a:ext uri="{FF2B5EF4-FFF2-40B4-BE49-F238E27FC236}">
-                <a16:creationId xmlns:a16="http://schemas.microsoft.com/office/drawing/2014/main" id="{E20FF5F1-5F3E-4D3D-A908-D8EAFA6EF70E}"/>
+                <a16:creationId xmlns:a16="http://schemas.microsoft.com/office/drawing/2014/main" id="{44D181D1-7670-4B36-BFAD-8B9A15C0C946}"/>
               </a:ext>
             </a:extLst>
           </p:cNvPr>
@@ -6236,7 +6236,7 @@
           <p:cNvPr id="15" name="">
             <a:extLst xmlns:a="http://schemas.openxmlformats.org/drawingml/2006/main">
               <a:ext uri="{FF2B5EF4-FFF2-40B4-BE49-F238E27FC236}">
-                <a16:creationId xmlns:a16="http://schemas.microsoft.com/office/drawing/2014/main" id="{1EEC31F5-DB22-41B0-BF67-920798306EB0}"/>
+                <a16:creationId xmlns:a16="http://schemas.microsoft.com/office/drawing/2014/main" id="{C410BCC3-0435-46C5-B2BA-432E46205DFC}"/>
               </a:ext>
             </a:extLst>
           </p:cNvPr>
@@ -6268,7 +6268,7 @@
           <p:cNvPr id="16" name="">
             <a:extLst xmlns:a="http://schemas.openxmlformats.org/drawingml/2006/main">
               <a:ext uri="{FF2B5EF4-FFF2-40B4-BE49-F238E27FC236}">
-                <a16:creationId xmlns:a16="http://schemas.microsoft.com/office/drawing/2014/main" id="{EEFC0337-D934-4DC4-97B4-6240E179A089}"/>
+                <a16:creationId xmlns:a16="http://schemas.microsoft.com/office/drawing/2014/main" id="{68B7E99C-9A3D-4410-9FF6-82692FE7ADDB}"/>
               </a:ext>
             </a:extLst>
           </p:cNvPr>
@@ -6325,7 +6325,7 @@
           <p:cNvPr id="17" name="">
             <a:extLst xmlns:a="http://schemas.openxmlformats.org/drawingml/2006/main">
               <a:ext uri="{FF2B5EF4-FFF2-40B4-BE49-F238E27FC236}">
-                <a16:creationId xmlns:a16="http://schemas.microsoft.com/office/drawing/2014/main" id="{630DEE09-DD26-49E2-974A-CAE60A998FD7}"/>
+                <a16:creationId xmlns:a16="http://schemas.microsoft.com/office/drawing/2014/main" id="{23093603-9B9A-4E99-A7CB-C0AB500C7185}"/>
               </a:ext>
             </a:extLst>
           </p:cNvPr>
@@ -6382,7 +6382,7 @@
           <p:cNvPr id="18" name="">
             <a:extLst xmlns:a="http://schemas.openxmlformats.org/drawingml/2006/main">
               <a:ext uri="{FF2B5EF4-FFF2-40B4-BE49-F238E27FC236}">
-                <a16:creationId xmlns:a16="http://schemas.microsoft.com/office/drawing/2014/main" id="{5B20A1E0-B4FF-4520-9499-C075714B0FEE}"/>
+                <a16:creationId xmlns:a16="http://schemas.microsoft.com/office/drawing/2014/main" id="{328FDDD1-F8C9-40F7-8659-A4714AE09992}"/>
               </a:ext>
             </a:extLst>
           </p:cNvPr>
@@ -6416,7 +6416,7 @@
           <p:cNvPr id="19" name="">
             <a:extLst xmlns:a="http://schemas.openxmlformats.org/drawingml/2006/main">
               <a:ext uri="{FF2B5EF4-FFF2-40B4-BE49-F238E27FC236}">
-                <a16:creationId xmlns:a16="http://schemas.microsoft.com/office/drawing/2014/main" id="{859B8D58-FA4E-48DC-83D9-72FE860476FD}"/>
+                <a16:creationId xmlns:a16="http://schemas.microsoft.com/office/drawing/2014/main" id="{862F765F-6781-4872-96E7-CF36FC5CB480}"/>
               </a:ext>
             </a:extLst>
           </p:cNvPr>
@@ -6448,7 +6448,7 @@
           <p:cNvPr id="20" name="">
             <a:extLst xmlns:a="http://schemas.openxmlformats.org/drawingml/2006/main">
               <a:ext uri="{FF2B5EF4-FFF2-40B4-BE49-F238E27FC236}">
-                <a16:creationId xmlns:a16="http://schemas.microsoft.com/office/drawing/2014/main" id="{315DDB25-3C02-4347-982B-8BB56FD9D3CC}"/>
+                <a16:creationId xmlns:a16="http://schemas.microsoft.com/office/drawing/2014/main" id="{E08B4195-E946-4CC7-96F0-12605FE78149}"/>
               </a:ext>
             </a:extLst>
           </p:cNvPr>
@@ -6505,7 +6505,7 @@
           <p:cNvPr id="21" name="">
             <a:extLst xmlns:a="http://schemas.openxmlformats.org/drawingml/2006/main">
               <a:ext uri="{FF2B5EF4-FFF2-40B4-BE49-F238E27FC236}">
-                <a16:creationId xmlns:a16="http://schemas.microsoft.com/office/drawing/2014/main" id="{8F5A2482-AFC2-4353-B294-2DE15BD93CF2}"/>
+                <a16:creationId xmlns:a16="http://schemas.microsoft.com/office/drawing/2014/main" id="{73EB4114-CE74-4149-9401-880DCA0F4AE9}"/>
               </a:ext>
             </a:extLst>
           </p:cNvPr>
@@ -6562,7 +6562,7 @@
           <p:cNvPr id="22" name="">
             <a:extLst xmlns:a="http://schemas.openxmlformats.org/drawingml/2006/main">
               <a:ext uri="{FF2B5EF4-FFF2-40B4-BE49-F238E27FC236}">
-                <a16:creationId xmlns:a16="http://schemas.microsoft.com/office/drawing/2014/main" id="{D33E084A-A9CE-423E-80B0-6EAAFDFDAAC8}"/>
+                <a16:creationId xmlns:a16="http://schemas.microsoft.com/office/drawing/2014/main" id="{17C6F724-48FC-4301-93DE-DC5440F03E7A}"/>
               </a:ext>
             </a:extLst>
           </p:cNvPr>
@@ -6617,7 +6617,7 @@
     </p:spTree>
     <p:extLst>
       <p:ext uri="{BB962C8B-B14F-4D97-AF65-F5344CB8AC3E}">
-        <p14:creationId xmlns:p14="http://schemas.microsoft.com/office/powerpoint/2010/main" val="788479369"/>
+        <p14:creationId xmlns:p14="http://schemas.microsoft.com/office/powerpoint/2010/main" val="1157612254"/>
       </p:ext>
     </p:extLst>
   </p:cSld>
@@ -6818,7 +6818,7 @@
           <p:cNvPr id="16" name="">
             <a:extLst xmlns:a="http://schemas.openxmlformats.org/drawingml/2006/main">
               <a:ext uri="{FF2B5EF4-FFF2-40B4-BE49-F238E27FC236}">
-                <a16:creationId xmlns:a16="http://schemas.microsoft.com/office/drawing/2014/main" id="{57029361-8968-4885-B6DF-885A187506D3}"/>
+                <a16:creationId xmlns:a16="http://schemas.microsoft.com/office/drawing/2014/main" id="{3714A072-5298-4758-9989-4BC348F806FE}"/>
               </a:ext>
             </a:extLst>
           </p:cNvPr>
@@ -6850,7 +6850,7 @@
           <p:cNvPr id="2" name="">
             <a:extLst xmlns:a="http://schemas.openxmlformats.org/drawingml/2006/main">
               <a:ext uri="{FF2B5EF4-FFF2-40B4-BE49-F238E27FC236}">
-                <a16:creationId xmlns:a16="http://schemas.microsoft.com/office/drawing/2014/main" id="{209CC587-6C31-4EC2-919A-ABF70B3E9D2B}"/>
+                <a16:creationId xmlns:a16="http://schemas.microsoft.com/office/drawing/2014/main" id="{19F97DAF-CD56-4E73-BB6A-F48C550D2106}"/>
               </a:ext>
             </a:extLst>
           </p:cNvPr>
@@ -6907,7 +6907,7 @@
           <p:cNvPr id="3" name="">
             <a:extLst xmlns:a="http://schemas.openxmlformats.org/drawingml/2006/main">
               <a:ext uri="{FF2B5EF4-FFF2-40B4-BE49-F238E27FC236}">
-                <a16:creationId xmlns:a16="http://schemas.microsoft.com/office/drawing/2014/main" id="{A69CDE44-FCA9-4271-AEF4-99D63ACD4399}"/>
+                <a16:creationId xmlns:a16="http://schemas.microsoft.com/office/drawing/2014/main" id="{133040DA-B636-45A2-8390-8252C9EFADDA}"/>
               </a:ext>
             </a:extLst>
           </p:cNvPr>
@@ -6939,7 +6939,7 @@
           <p:cNvPr id="4" name="">
             <a:extLst xmlns:a="http://schemas.openxmlformats.org/drawingml/2006/main">
               <a:ext uri="{FF2B5EF4-FFF2-40B4-BE49-F238E27FC236}">
-                <a16:creationId xmlns:a16="http://schemas.microsoft.com/office/drawing/2014/main" id="{C27E76DF-E2A5-473C-AB0E-AD7A5B62E762}"/>
+                <a16:creationId xmlns:a16="http://schemas.microsoft.com/office/drawing/2014/main" id="{97B52A05-E3E7-49DB-A091-1EBA7676ED9C}"/>
               </a:ext>
             </a:extLst>
           </p:cNvPr>
@@ -6996,7 +6996,7 @@
           <p:cNvPr id="5" name="">
             <a:extLst xmlns:a="http://schemas.openxmlformats.org/drawingml/2006/main">
               <a:ext uri="{FF2B5EF4-FFF2-40B4-BE49-F238E27FC236}">
-                <a16:creationId xmlns:a16="http://schemas.microsoft.com/office/drawing/2014/main" id="{B8C5D1B8-97EB-47A6-842B-7DBF5A3B1EBB}"/>
+                <a16:creationId xmlns:a16="http://schemas.microsoft.com/office/drawing/2014/main" id="{AF1A7E7F-F0C1-401D-BF22-64633BF451C5}"/>
               </a:ext>
             </a:extLst>
           </p:cNvPr>
@@ -7053,7 +7053,7 @@
           <p:cNvPr id="6" name="">
             <a:extLst xmlns:a="http://schemas.openxmlformats.org/drawingml/2006/main">
               <a:ext uri="{FF2B5EF4-FFF2-40B4-BE49-F238E27FC236}">
-                <a16:creationId xmlns:a16="http://schemas.microsoft.com/office/drawing/2014/main" id="{8C9A14A1-27C6-4AD6-8FD4-4C07AB104975}"/>
+                <a16:creationId xmlns:a16="http://schemas.microsoft.com/office/drawing/2014/main" id="{AC7D833D-2B87-4929-99CA-ED005BEEEA9F}"/>
               </a:ext>
             </a:extLst>
           </p:cNvPr>
@@ -7110,7 +7110,7 @@
           <p:cNvPr id="7" name="">
             <a:extLst xmlns:a="http://schemas.openxmlformats.org/drawingml/2006/main">
               <a:ext uri="{FF2B5EF4-FFF2-40B4-BE49-F238E27FC236}">
-                <a16:creationId xmlns:a16="http://schemas.microsoft.com/office/drawing/2014/main" id="{2D8A5E16-636C-48D6-BBC6-5EA3FF72616E}"/>
+                <a16:creationId xmlns:a16="http://schemas.microsoft.com/office/drawing/2014/main" id="{E90FED3C-A03B-4D22-A478-9BFECE4EC1C9}"/>
               </a:ext>
             </a:extLst>
           </p:cNvPr>
@@ -7142,7 +7142,7 @@
           <p:cNvPr id="8" name="">
             <a:extLst xmlns:a="http://schemas.openxmlformats.org/drawingml/2006/main">
               <a:ext uri="{FF2B5EF4-FFF2-40B4-BE49-F238E27FC236}">
-                <a16:creationId xmlns:a16="http://schemas.microsoft.com/office/drawing/2014/main" id="{5E2CC344-CB28-4A42-9323-4779B0DF304C}"/>
+                <a16:creationId xmlns:a16="http://schemas.microsoft.com/office/drawing/2014/main" id="{1B8E6286-8B65-4EAA-97DC-FADC75FD95EE}"/>
               </a:ext>
             </a:extLst>
           </p:cNvPr>
@@ -7199,7 +7199,7 @@
           <p:cNvPr id="9" name="">
             <a:extLst xmlns:a="http://schemas.openxmlformats.org/drawingml/2006/main">
               <a:ext uri="{FF2B5EF4-FFF2-40B4-BE49-F238E27FC236}">
-                <a16:creationId xmlns:a16="http://schemas.microsoft.com/office/drawing/2014/main" id="{8B99C287-12B6-45F0-AEFD-56B3F185BE2A}"/>
+                <a16:creationId xmlns:a16="http://schemas.microsoft.com/office/drawing/2014/main" id="{F9B7ABB1-61D0-478E-8019-F0B4520B455F}"/>
               </a:ext>
             </a:extLst>
           </p:cNvPr>
@@ -7256,7 +7256,7 @@
           <p:cNvPr id="10" name="">
             <a:extLst xmlns:a="http://schemas.openxmlformats.org/drawingml/2006/main">
               <a:ext uri="{FF2B5EF4-FFF2-40B4-BE49-F238E27FC236}">
-                <a16:creationId xmlns:a16="http://schemas.microsoft.com/office/drawing/2014/main" id="{A852F14F-FE84-4D8E-AA4A-B61AABC3B641}"/>
+                <a16:creationId xmlns:a16="http://schemas.microsoft.com/office/drawing/2014/main" id="{C125C8B1-D113-4DAC-8800-27FCA7E23C20}"/>
               </a:ext>
             </a:extLst>
           </p:cNvPr>
@@ -7313,7 +7313,7 @@
           <p:cNvPr id="11" name="">
             <a:extLst xmlns:a="http://schemas.openxmlformats.org/drawingml/2006/main">
               <a:ext uri="{FF2B5EF4-FFF2-40B4-BE49-F238E27FC236}">
-                <a16:creationId xmlns:a16="http://schemas.microsoft.com/office/drawing/2014/main" id="{90526CAF-BFE2-402F-8133-AFDD3C3F8A51}"/>
+                <a16:creationId xmlns:a16="http://schemas.microsoft.com/office/drawing/2014/main" id="{3D33AE3C-7C5F-41D4-8AB1-F70C9948F432}"/>
               </a:ext>
             </a:extLst>
           </p:cNvPr>
@@ -7345,7 +7345,7 @@
           <p:cNvPr id="12" name="">
             <a:extLst xmlns:a="http://schemas.openxmlformats.org/drawingml/2006/main">
               <a:ext uri="{FF2B5EF4-FFF2-40B4-BE49-F238E27FC236}">
-                <a16:creationId xmlns:a16="http://schemas.microsoft.com/office/drawing/2014/main" id="{D9B395E8-2A43-402E-B30E-D15E2F61E82E}"/>
+                <a16:creationId xmlns:a16="http://schemas.microsoft.com/office/drawing/2014/main" id="{9A1783D7-1BE6-4762-80C5-7F0E7BDA2004}"/>
               </a:ext>
             </a:extLst>
           </p:cNvPr>
@@ -7402,7 +7402,7 @@
           <p:cNvPr id="13" name="">
             <a:extLst xmlns:a="http://schemas.openxmlformats.org/drawingml/2006/main">
               <a:ext uri="{FF2B5EF4-FFF2-40B4-BE49-F238E27FC236}">
-                <a16:creationId xmlns:a16="http://schemas.microsoft.com/office/drawing/2014/main" id="{4900355C-B960-418D-89B3-1EE87A206C6D}"/>
+                <a16:creationId xmlns:a16="http://schemas.microsoft.com/office/drawing/2014/main" id="{45473D71-3C2E-45D9-BD72-4076C76E6D26}"/>
               </a:ext>
             </a:extLst>
           </p:cNvPr>
@@ -7459,7 +7459,7 @@
           <p:cNvPr id="14" name="">
             <a:extLst xmlns:a="http://schemas.openxmlformats.org/drawingml/2006/main">
               <a:ext uri="{FF2B5EF4-FFF2-40B4-BE49-F238E27FC236}">
-                <a16:creationId xmlns:a16="http://schemas.microsoft.com/office/drawing/2014/main" id="{8A568BEF-15FE-4D17-8C54-95CB4EAE0B8E}"/>
+                <a16:creationId xmlns:a16="http://schemas.microsoft.com/office/drawing/2014/main" id="{0BF120BA-0B70-4A3E-AFA1-D76A9CD96BF2}"/>
               </a:ext>
             </a:extLst>
           </p:cNvPr>
@@ -7516,7 +7516,7 @@
           <p:cNvPr id="15" name="">
             <a:extLst xmlns:a="http://schemas.openxmlformats.org/drawingml/2006/main">
               <a:ext uri="{FF2B5EF4-FFF2-40B4-BE49-F238E27FC236}">
-                <a16:creationId xmlns:a16="http://schemas.microsoft.com/office/drawing/2014/main" id="{599D9A53-F7C6-4B99-B066-780A196E3610}"/>
+                <a16:creationId xmlns:a16="http://schemas.microsoft.com/office/drawing/2014/main" id="{57785381-A932-42B2-8CC7-BBB6977EEA6B}"/>
               </a:ext>
             </a:extLst>
           </p:cNvPr>
@@ -7571,7 +7571,7 @@
     </p:spTree>
     <p:extLst>
       <p:ext uri="{BB962C8B-B14F-4D97-AF65-F5344CB8AC3E}">
-        <p14:creationId xmlns:p14="http://schemas.microsoft.com/office/powerpoint/2010/main" val="1159681881"/>
+        <p14:creationId xmlns:p14="http://schemas.microsoft.com/office/powerpoint/2010/main" val="476919093"/>
       </p:ext>
     </p:extLst>
   </p:cSld>
@@ -7772,7 +7772,7 @@
           <p:cNvPr id="23" name="">
             <a:extLst xmlns:a="http://schemas.openxmlformats.org/drawingml/2006/main">
               <a:ext uri="{FF2B5EF4-FFF2-40B4-BE49-F238E27FC236}">
-                <a16:creationId xmlns:a16="http://schemas.microsoft.com/office/drawing/2014/main" id="{5F8185FF-F9FC-4D14-B299-8A814E60193D}"/>
+                <a16:creationId xmlns:a16="http://schemas.microsoft.com/office/drawing/2014/main" id="{A83838FF-1F68-4749-807E-029DA43E8DCC}"/>
               </a:ext>
             </a:extLst>
           </p:cNvPr>
@@ -7804,7 +7804,7 @@
           <p:cNvPr id="2" name="">
             <a:extLst xmlns:a="http://schemas.openxmlformats.org/drawingml/2006/main">
               <a:ext uri="{FF2B5EF4-FFF2-40B4-BE49-F238E27FC236}">
-                <a16:creationId xmlns:a16="http://schemas.microsoft.com/office/drawing/2014/main" id="{7480D11D-CE32-4D58-ABB1-62BEFBA55325}"/>
+                <a16:creationId xmlns:a16="http://schemas.microsoft.com/office/drawing/2014/main" id="{C21E13A7-29D6-4C11-92B8-635278041D4E}"/>
               </a:ext>
             </a:extLst>
           </p:cNvPr>
@@ -7861,7 +7861,7 @@
           <p:cNvPr id="3" name="">
             <a:extLst xmlns:a="http://schemas.openxmlformats.org/drawingml/2006/main">
               <a:ext uri="{FF2B5EF4-FFF2-40B4-BE49-F238E27FC236}">
-                <a16:creationId xmlns:a16="http://schemas.microsoft.com/office/drawing/2014/main" id="{8CFCD0E2-EE09-4A4F-A3D1-E626A68610A6}"/>
+                <a16:creationId xmlns:a16="http://schemas.microsoft.com/office/drawing/2014/main" id="{C2148A5F-F24E-4717-869C-1C4875CDC423}"/>
               </a:ext>
             </a:extLst>
           </p:cNvPr>
@@ -7893,7 +7893,7 @@
           <p:cNvPr id="4" name="">
             <a:extLst xmlns:a="http://schemas.openxmlformats.org/drawingml/2006/main">
               <a:ext uri="{FF2B5EF4-FFF2-40B4-BE49-F238E27FC236}">
-                <a16:creationId xmlns:a16="http://schemas.microsoft.com/office/drawing/2014/main" id="{8F6DAF78-0B44-428B-933C-8248BFD6FA12}"/>
+                <a16:creationId xmlns:a16="http://schemas.microsoft.com/office/drawing/2014/main" id="{AF255544-31E7-46E8-B0B7-452BA212D3D5}"/>
               </a:ext>
             </a:extLst>
           </p:cNvPr>
@@ -7950,7 +7950,7 @@
           <p:cNvPr id="5" name="">
             <a:extLst xmlns:a="http://schemas.openxmlformats.org/drawingml/2006/main">
               <a:ext uri="{FF2B5EF4-FFF2-40B4-BE49-F238E27FC236}">
-                <a16:creationId xmlns:a16="http://schemas.microsoft.com/office/drawing/2014/main" id="{7A5A9095-C9F4-4B05-91BF-67C61A4F0CF4}"/>
+                <a16:creationId xmlns:a16="http://schemas.microsoft.com/office/drawing/2014/main" id="{BC75D930-6652-4011-B41B-966346F89D2A}"/>
               </a:ext>
             </a:extLst>
           </p:cNvPr>
@@ -8007,7 +8007,7 @@
           <p:cNvPr id="6" name="">
             <a:extLst xmlns:a="http://schemas.openxmlformats.org/drawingml/2006/main">
               <a:ext uri="{FF2B5EF4-FFF2-40B4-BE49-F238E27FC236}">
-                <a16:creationId xmlns:a16="http://schemas.microsoft.com/office/drawing/2014/main" id="{7A83A552-5026-40B8-872C-901FB63412F4}"/>
+                <a16:creationId xmlns:a16="http://schemas.microsoft.com/office/drawing/2014/main" id="{806055CC-F346-4FBA-8FD6-CE7A8305474B}"/>
               </a:ext>
             </a:extLst>
           </p:cNvPr>
@@ -8064,7 +8064,7 @@
           <p:cNvPr id="7" name="">
             <a:extLst xmlns:a="http://schemas.openxmlformats.org/drawingml/2006/main">
               <a:ext uri="{FF2B5EF4-FFF2-40B4-BE49-F238E27FC236}">
-                <a16:creationId xmlns:a16="http://schemas.microsoft.com/office/drawing/2014/main" id="{94AC7F0F-9E68-4481-B5C0-F95A42D7E5E6}"/>
+                <a16:creationId xmlns:a16="http://schemas.microsoft.com/office/drawing/2014/main" id="{8213B68B-2D6A-4E43-8B0D-BB0D8A6FD2DC}"/>
               </a:ext>
             </a:extLst>
           </p:cNvPr>
@@ -8096,7 +8096,7 @@
           <p:cNvPr id="8" name="">
             <a:extLst xmlns:a="http://schemas.openxmlformats.org/drawingml/2006/main">
               <a:ext uri="{FF2B5EF4-FFF2-40B4-BE49-F238E27FC236}">
-                <a16:creationId xmlns:a16="http://schemas.microsoft.com/office/drawing/2014/main" id="{398A4707-58EF-4F0B-BCAC-45E75FCAFE06}"/>
+                <a16:creationId xmlns:a16="http://schemas.microsoft.com/office/drawing/2014/main" id="{BCCFF5D3-E844-4B79-ACE0-43B3AD504AE1}"/>
               </a:ext>
             </a:extLst>
           </p:cNvPr>
@@ -8153,7 +8153,7 @@
           <p:cNvPr id="9" name="">
             <a:extLst xmlns:a="http://schemas.openxmlformats.org/drawingml/2006/main">
               <a:ext uri="{FF2B5EF4-FFF2-40B4-BE49-F238E27FC236}">
-                <a16:creationId xmlns:a16="http://schemas.microsoft.com/office/drawing/2014/main" id="{ABF18D7D-5FC4-4D2F-90E0-6204D5084E10}"/>
+                <a16:creationId xmlns:a16="http://schemas.microsoft.com/office/drawing/2014/main" id="{AFE3F59A-7D95-49D3-B217-9612DD217A39}"/>
               </a:ext>
             </a:extLst>
           </p:cNvPr>
@@ -8210,19 +8210,19 @@
           <p:cNvPr id="10" name="">
             <a:extLst xmlns:a="http://schemas.openxmlformats.org/drawingml/2006/main">
               <a:ext uri="{FF2B5EF4-FFF2-40B4-BE49-F238E27FC236}">
-                <a16:creationId xmlns:a16="http://schemas.microsoft.com/office/drawing/2014/main" id="{48292656-B474-4B5B-806F-3220336115DE}"/>
-              </a:ext>
-            </a:extLst>
-          </p:cNvPr>
-          <p:cNvSpPr>
-            <a:spLocks xmlns:a="http://schemas.openxmlformats.org/drawingml/2006/main" noGrp="1"/>
-          </p:cNvSpPr>
-          <p:nvPr/>
-        </p:nvSpPr>
-        <p:spPr>
-          <a:xfrm xmlns:a="http://schemas.openxmlformats.org/drawingml/2006/main">
-            <a:off x="914400" y="1257300"/>
-            <a:ext cx="10363200" cy="781050"/>
+                <a16:creationId xmlns:a16="http://schemas.microsoft.com/office/drawing/2014/main" id="{77F8CE07-EB86-4311-BDAE-B01B1464069A}"/>
+              </a:ext>
+            </a:extLst>
+          </p:cNvPr>
+          <p:cNvSpPr>
+            <a:spLocks xmlns:a="http://schemas.openxmlformats.org/drawingml/2006/main" noGrp="1"/>
+          </p:cNvSpPr>
+          <p:nvPr/>
+        </p:nvSpPr>
+        <p:spPr>
+          <a:xfrm xmlns:a="http://schemas.openxmlformats.org/drawingml/2006/main">
+            <a:off x="857250" y="1219200"/>
+            <a:ext cx="10477500" cy="742950"/>
           </a:xfrm>
           <a:prstGeom xmlns:a="http://schemas.openxmlformats.org/drawingml/2006/main" prst="rect">
             <a:avLst/>
@@ -8239,7 +8239,7 @@
           <a:lstStyle xmlns:a="http://schemas.openxmlformats.org/drawingml/2006/main"/>
           <a:p xmlns:a="http://schemas.openxmlformats.org/drawingml/2006/main">
             <a:pPr algn="ctr">
-              <a:defRPr sz="2175" b="1">
+              <a:defRPr sz="2100" b="1">
                 <a:solidFill>
                   <a:srgbClr val="17253A"/>
                 </a:solidFill>
@@ -8249,7 +8249,7 @@
               </a:defRPr>
             </a:pPr>
             <a:r>
-              <a:rPr sz="2175" b="1">
+              <a:rPr sz="2100" b="1">
                 <a:solidFill>
                   <a:srgbClr val="17253A"/>
                 </a:solidFill>
@@ -8267,28 +8267,30 @@
           <p:cNvPr id="11" name="">
             <a:extLst xmlns:a="http://schemas.openxmlformats.org/drawingml/2006/main">
               <a:ext uri="{FF2B5EF4-FFF2-40B4-BE49-F238E27FC236}">
-                <a16:creationId xmlns:a16="http://schemas.microsoft.com/office/drawing/2014/main" id="{58F6BE59-0C76-43A2-92E8-7B0551329CB7}"/>
-              </a:ext>
-            </a:extLst>
-          </p:cNvPr>
-          <p:cNvSpPr>
-            <a:spLocks xmlns:a="http://schemas.openxmlformats.org/drawingml/2006/main" noGrp="1"/>
-          </p:cNvSpPr>
-          <p:nvPr/>
-        </p:nvSpPr>
-        <p:spPr>
-          <a:xfrm xmlns:a="http://schemas.openxmlformats.org/drawingml/2006/main">
-            <a:off x="1000125" y="2247900"/>
-            <a:ext cx="476250" cy="476250"/>
-          </a:xfrm>
-          <a:prstGeom xmlns:a="http://schemas.openxmlformats.org/drawingml/2006/main" prst="ellipse">
+                <a16:creationId xmlns:a16="http://schemas.microsoft.com/office/drawing/2014/main" id="{05CF9E99-6C32-492F-B6B8-8C18EF70E753}"/>
+              </a:ext>
+            </a:extLst>
+          </p:cNvPr>
+          <p:cNvSpPr>
+            <a:spLocks xmlns:a="http://schemas.openxmlformats.org/drawingml/2006/main" noGrp="1"/>
+          </p:cNvSpPr>
+          <p:nvPr/>
+        </p:nvSpPr>
+        <p:spPr>
+          <a:xfrm xmlns:a="http://schemas.openxmlformats.org/drawingml/2006/main">
+            <a:off x="971550" y="2124075"/>
+            <a:ext cx="38100" cy="3524250"/>
+          </a:xfrm>
+          <a:prstGeom xmlns:a="http://schemas.openxmlformats.org/drawingml/2006/main" prst="rect">
             <a:avLst/>
           </a:prstGeom>
           <a:solidFill xmlns:a="http://schemas.openxmlformats.org/drawingml/2006/main">
-            <a:srgbClr val="18324A"/>
+            <a:srgbClr val="2C6E73"/>
           </a:solidFill>
           <a:ln xmlns:a="http://schemas.openxmlformats.org/drawingml/2006/main" w="0">
-            <a:noFill/>
+            <a:solidFill>
+              <a:srgbClr val="2C6E73"/>
+            </a:solidFill>
           </a:ln>
         </p:spPr>
       </p:sp>
@@ -8297,19 +8299,19 @@
           <p:cNvPr id="12" name="">
             <a:extLst xmlns:a="http://schemas.openxmlformats.org/drawingml/2006/main">
               <a:ext uri="{FF2B5EF4-FFF2-40B4-BE49-F238E27FC236}">
-                <a16:creationId xmlns:a16="http://schemas.microsoft.com/office/drawing/2014/main" id="{C8BA1D3C-A157-4368-A30E-0B8C90024D8F}"/>
-              </a:ext>
-            </a:extLst>
-          </p:cNvPr>
-          <p:cNvSpPr>
-            <a:spLocks xmlns:a="http://schemas.openxmlformats.org/drawingml/2006/main" noGrp="1"/>
-          </p:cNvSpPr>
-          <p:nvPr/>
-        </p:nvSpPr>
-        <p:spPr>
-          <a:xfrm xmlns:a="http://schemas.openxmlformats.org/drawingml/2006/main">
-            <a:off x="1000125" y="2276475"/>
-            <a:ext cx="476250" cy="419100"/>
+                <a16:creationId xmlns:a16="http://schemas.microsoft.com/office/drawing/2014/main" id="{970D302B-C4E0-48EB-AA3E-55B9677D7B2E}"/>
+              </a:ext>
+            </a:extLst>
+          </p:cNvPr>
+          <p:cNvSpPr>
+            <a:spLocks xmlns:a="http://schemas.openxmlformats.org/drawingml/2006/main" noGrp="1"/>
+          </p:cNvSpPr>
+          <p:nvPr/>
+        </p:nvSpPr>
+        <p:spPr>
+          <a:xfrm xmlns:a="http://schemas.openxmlformats.org/drawingml/2006/main">
+            <a:off x="1162050" y="2200275"/>
+            <a:ext cx="400050" cy="400050"/>
           </a:xfrm>
           <a:prstGeom xmlns:a="http://schemas.openxmlformats.org/drawingml/2006/main" prst="rect">
             <a:avLst/>
@@ -8326,9 +8328,9 @@
           <a:lstStyle xmlns:a="http://schemas.openxmlformats.org/drawingml/2006/main"/>
           <a:p xmlns:a="http://schemas.openxmlformats.org/drawingml/2006/main">
             <a:pPr algn="ctr">
-              <a:defRPr sz="1350" b="1">
-                <a:solidFill>
-                  <a:srgbClr val="FFFFFF"/>
+              <a:defRPr sz="1125" b="1">
+                <a:solidFill>
+                  <a:srgbClr val="2C6E73"/>
                 </a:solidFill>
                 <a:latin typeface="Arial"/>
                 <a:ea typeface="Arial"/>
@@ -8336,9 +8338,9 @@
               </a:defRPr>
             </a:pPr>
             <a:r>
-              <a:rPr sz="1350" b="1">
-                <a:solidFill>
-                  <a:srgbClr val="FFFFFF"/>
+              <a:rPr sz="1125" b="1">
+                <a:solidFill>
+                  <a:srgbClr val="2C6E73"/>
                 </a:solidFill>
                 <a:latin typeface="Arial"/>
                 <a:ea typeface="Arial"/>
@@ -8354,19 +8356,19 @@
           <p:cNvPr id="13" name="">
             <a:extLst xmlns:a="http://schemas.openxmlformats.org/drawingml/2006/main">
               <a:ext uri="{FF2B5EF4-FFF2-40B4-BE49-F238E27FC236}">
-                <a16:creationId xmlns:a16="http://schemas.microsoft.com/office/drawing/2014/main" id="{2CFEECEE-FE80-4CA3-B535-FB4B3FDC6011}"/>
-              </a:ext>
-            </a:extLst>
-          </p:cNvPr>
-          <p:cNvSpPr>
-            <a:spLocks xmlns:a="http://schemas.openxmlformats.org/drawingml/2006/main" noGrp="1"/>
-          </p:cNvSpPr>
-          <p:nvPr/>
-        </p:nvSpPr>
-        <p:spPr>
-          <a:xfrm xmlns:a="http://schemas.openxmlformats.org/drawingml/2006/main">
-            <a:off x="1714500" y="2181225"/>
-            <a:ext cx="9429750" cy="609600"/>
+                <a16:creationId xmlns:a16="http://schemas.microsoft.com/office/drawing/2014/main" id="{F9CC567A-B4E7-4A6F-8EFB-E3991487A9D5}"/>
+              </a:ext>
+            </a:extLst>
+          </p:cNvPr>
+          <p:cNvSpPr>
+            <a:spLocks xmlns:a="http://schemas.openxmlformats.org/drawingml/2006/main" noGrp="1"/>
+          </p:cNvSpPr>
+          <p:nvPr/>
+        </p:nvSpPr>
+        <p:spPr>
+          <a:xfrm xmlns:a="http://schemas.openxmlformats.org/drawingml/2006/main">
+            <a:off x="1714500" y="2114550"/>
+            <a:ext cx="9525000" cy="809625"/>
           </a:xfrm>
           <a:prstGeom xmlns:a="http://schemas.openxmlformats.org/drawingml/2006/main" prst="rect">
             <a:avLst/>
@@ -8383,7 +8385,7 @@
           <a:lstStyle xmlns:a="http://schemas.openxmlformats.org/drawingml/2006/main"/>
           <a:p xmlns:a="http://schemas.openxmlformats.org/drawingml/2006/main">
             <a:pPr algn="l">
-              <a:defRPr sz="1500" b="0">
+              <a:defRPr sz="1725" b="0">
                 <a:solidFill>
                   <a:srgbClr val="17253A"/>
                 </a:solidFill>
@@ -8393,7 +8395,7 @@
               </a:defRPr>
             </a:pPr>
             <a:r>
-              <a:rPr sz="1500" b="0">
+              <a:rPr sz="1725" b="0">
                 <a:solidFill>
                   <a:srgbClr val="17253A"/>
                 </a:solidFill>
@@ -8401,7 +8403,7 @@
                 <a:ea typeface="Arial"/>
                 <a:cs typeface="Arial"/>
               </a:rPr>
-              <a:t>Identify the structure: Read the title, labels, scale and total before calculating.</a:t>
+              <a:t>15 out of 60 pupils choose art</a:t>
             </a:r>
           </a:p>
         </p:txBody>
@@ -8411,28 +8413,30 @@
           <p:cNvPr id="14" name="">
             <a:extLst xmlns:a="http://schemas.openxmlformats.org/drawingml/2006/main">
               <a:ext uri="{FF2B5EF4-FFF2-40B4-BE49-F238E27FC236}">
-                <a16:creationId xmlns:a16="http://schemas.microsoft.com/office/drawing/2014/main" id="{AD59E9A7-DA0B-400B-A756-8DDD5875E8DD}"/>
-              </a:ext>
-            </a:extLst>
-          </p:cNvPr>
-          <p:cNvSpPr>
-            <a:spLocks xmlns:a="http://schemas.openxmlformats.org/drawingml/2006/main" noGrp="1"/>
-          </p:cNvSpPr>
-          <p:nvPr/>
-        </p:nvSpPr>
-        <p:spPr>
-          <a:xfrm xmlns:a="http://schemas.openxmlformats.org/drawingml/2006/main">
-            <a:off x="1000125" y="2990850"/>
-            <a:ext cx="476250" cy="476250"/>
-          </a:xfrm>
-          <a:prstGeom xmlns:a="http://schemas.openxmlformats.org/drawingml/2006/main" prst="ellipse">
+                <a16:creationId xmlns:a16="http://schemas.microsoft.com/office/drawing/2014/main" id="{BE9B4C41-9091-4016-83BA-D3F27B592773}"/>
+              </a:ext>
+            </a:extLst>
+          </p:cNvPr>
+          <p:cNvSpPr>
+            <a:spLocks xmlns:a="http://schemas.openxmlformats.org/drawingml/2006/main" noGrp="1"/>
+          </p:cNvSpPr>
+          <p:nvPr/>
+        </p:nvSpPr>
+        <p:spPr>
+          <a:xfrm xmlns:a="http://schemas.openxmlformats.org/drawingml/2006/main">
+            <a:off x="1714500" y="2943225"/>
+            <a:ext cx="9334500" cy="9525"/>
+          </a:xfrm>
+          <a:prstGeom xmlns:a="http://schemas.openxmlformats.org/drawingml/2006/main" prst="rect">
             <a:avLst/>
           </a:prstGeom>
           <a:solidFill xmlns:a="http://schemas.openxmlformats.org/drawingml/2006/main">
-            <a:srgbClr val="2C6E73"/>
+            <a:srgbClr val="D9E0E6"/>
           </a:solidFill>
           <a:ln xmlns:a="http://schemas.openxmlformats.org/drawingml/2006/main" w="0">
-            <a:noFill/>
+            <a:solidFill>
+              <a:srgbClr val="D9E0E6"/>
+            </a:solidFill>
           </a:ln>
         </p:spPr>
       </p:sp>
@@ -8441,19 +8445,19 @@
           <p:cNvPr id="15" name="">
             <a:extLst xmlns:a="http://schemas.openxmlformats.org/drawingml/2006/main">
               <a:ext uri="{FF2B5EF4-FFF2-40B4-BE49-F238E27FC236}">
-                <a16:creationId xmlns:a16="http://schemas.microsoft.com/office/drawing/2014/main" id="{426DBB05-881A-4D87-A825-000B4072C10A}"/>
-              </a:ext>
-            </a:extLst>
-          </p:cNvPr>
-          <p:cNvSpPr>
-            <a:spLocks xmlns:a="http://schemas.openxmlformats.org/drawingml/2006/main" noGrp="1"/>
-          </p:cNvSpPr>
-          <p:nvPr/>
-        </p:nvSpPr>
-        <p:spPr>
-          <a:xfrm xmlns:a="http://schemas.openxmlformats.org/drawingml/2006/main">
-            <a:off x="1000125" y="3019425"/>
-            <a:ext cx="476250" cy="419100"/>
+                <a16:creationId xmlns:a16="http://schemas.microsoft.com/office/drawing/2014/main" id="{12D9FFD5-AC87-4A9F-822E-18F0204A0B34}"/>
+              </a:ext>
+            </a:extLst>
+          </p:cNvPr>
+          <p:cNvSpPr>
+            <a:spLocks xmlns:a="http://schemas.openxmlformats.org/drawingml/2006/main" noGrp="1"/>
+          </p:cNvSpPr>
+          <p:nvPr/>
+        </p:nvSpPr>
+        <p:spPr>
+          <a:xfrm xmlns:a="http://schemas.openxmlformats.org/drawingml/2006/main">
+            <a:off x="1162050" y="3076575"/>
+            <a:ext cx="400050" cy="400050"/>
           </a:xfrm>
           <a:prstGeom xmlns:a="http://schemas.openxmlformats.org/drawingml/2006/main" prst="rect">
             <a:avLst/>
@@ -8470,9 +8474,9 @@
           <a:lstStyle xmlns:a="http://schemas.openxmlformats.org/drawingml/2006/main"/>
           <a:p xmlns:a="http://schemas.openxmlformats.org/drawingml/2006/main">
             <a:pPr algn="ctr">
-              <a:defRPr sz="1350" b="1">
-                <a:solidFill>
-                  <a:srgbClr val="FFFFFF"/>
+              <a:defRPr sz="1125" b="1">
+                <a:solidFill>
+                  <a:srgbClr val="2C6E73"/>
                 </a:solidFill>
                 <a:latin typeface="Arial"/>
                 <a:ea typeface="Arial"/>
@@ -8480,9 +8484,9 @@
               </a:defRPr>
             </a:pPr>
             <a:r>
-              <a:rPr sz="1350" b="1">
-                <a:solidFill>
-                  <a:srgbClr val="FFFFFF"/>
+              <a:rPr sz="1125" b="1">
+                <a:solidFill>
+                  <a:srgbClr val="2C6E73"/>
                 </a:solidFill>
                 <a:latin typeface="Arial"/>
                 <a:ea typeface="Arial"/>
@@ -8498,19 +8502,19 @@
           <p:cNvPr id="16" name="">
             <a:extLst xmlns:a="http://schemas.openxmlformats.org/drawingml/2006/main">
               <a:ext uri="{FF2B5EF4-FFF2-40B4-BE49-F238E27FC236}">
-                <a16:creationId xmlns:a16="http://schemas.microsoft.com/office/drawing/2014/main" id="{1732172C-D050-41D0-9CC5-2CADAF28AEA0}"/>
-              </a:ext>
-            </a:extLst>
-          </p:cNvPr>
-          <p:cNvSpPr>
-            <a:spLocks xmlns:a="http://schemas.openxmlformats.org/drawingml/2006/main" noGrp="1"/>
-          </p:cNvSpPr>
-          <p:nvPr/>
-        </p:nvSpPr>
-        <p:spPr>
-          <a:xfrm xmlns:a="http://schemas.openxmlformats.org/drawingml/2006/main">
-            <a:off x="1714500" y="2924175"/>
-            <a:ext cx="9429750" cy="609600"/>
+                <a16:creationId xmlns:a16="http://schemas.microsoft.com/office/drawing/2014/main" id="{B108C1D6-8D86-46FE-B1BB-4E294784AD22}"/>
+              </a:ext>
+            </a:extLst>
+          </p:cNvPr>
+          <p:cNvSpPr>
+            <a:spLocks xmlns:a="http://schemas.openxmlformats.org/drawingml/2006/main" noGrp="1"/>
+          </p:cNvSpPr>
+          <p:nvPr/>
+        </p:nvSpPr>
+        <p:spPr>
+          <a:xfrm xmlns:a="http://schemas.openxmlformats.org/drawingml/2006/main">
+            <a:off x="1714500" y="2990850"/>
+            <a:ext cx="9525000" cy="809625"/>
           </a:xfrm>
           <a:prstGeom xmlns:a="http://schemas.openxmlformats.org/drawingml/2006/main" prst="rect">
             <a:avLst/>
@@ -8527,7 +8531,7 @@
           <a:lstStyle xmlns:a="http://schemas.openxmlformats.org/drawingml/2006/main"/>
           <a:p xmlns:a="http://schemas.openxmlformats.org/drawingml/2006/main">
             <a:pPr algn="l">
-              <a:defRPr sz="1500" b="0">
+              <a:defRPr sz="1725" b="0">
                 <a:solidFill>
                   <a:srgbClr val="17253A"/>
                 </a:solidFill>
@@ -8537,7 +8541,7 @@
               </a:defRPr>
             </a:pPr>
             <a:r>
-              <a:rPr sz="1500" b="0">
+              <a:rPr sz="1725" b="0">
                 <a:solidFill>
                   <a:srgbClr val="17253A"/>
                 </a:solidFill>
@@ -8545,7 +8549,7 @@
                 <a:ea typeface="Arial"/>
                 <a:cs typeface="Arial"/>
               </a:rPr>
-              <a:t>Set up the method: Use proportional reasoning or add then divide for the mean.</a:t>
+              <a:t>15/60 = 1/4</a:t>
             </a:r>
           </a:p>
         </p:txBody>
@@ -8555,28 +8559,30 @@
           <p:cNvPr id="17" name="">
             <a:extLst xmlns:a="http://schemas.openxmlformats.org/drawingml/2006/main">
               <a:ext uri="{FF2B5EF4-FFF2-40B4-BE49-F238E27FC236}">
-                <a16:creationId xmlns:a16="http://schemas.microsoft.com/office/drawing/2014/main" id="{C05E9929-9D67-4B39-975D-B44D6476FB73}"/>
-              </a:ext>
-            </a:extLst>
-          </p:cNvPr>
-          <p:cNvSpPr>
-            <a:spLocks xmlns:a="http://schemas.openxmlformats.org/drawingml/2006/main" noGrp="1"/>
-          </p:cNvSpPr>
-          <p:nvPr/>
-        </p:nvSpPr>
-        <p:spPr>
-          <a:xfrm xmlns:a="http://schemas.openxmlformats.org/drawingml/2006/main">
-            <a:off x="1000125" y="3733800"/>
-            <a:ext cx="476250" cy="476250"/>
-          </a:xfrm>
-          <a:prstGeom xmlns:a="http://schemas.openxmlformats.org/drawingml/2006/main" prst="ellipse">
+                <a16:creationId xmlns:a16="http://schemas.microsoft.com/office/drawing/2014/main" id="{30C629A4-F655-4DEA-A636-0EA8E9A9438D}"/>
+              </a:ext>
+            </a:extLst>
+          </p:cNvPr>
+          <p:cNvSpPr>
+            <a:spLocks xmlns:a="http://schemas.openxmlformats.org/drawingml/2006/main" noGrp="1"/>
+          </p:cNvSpPr>
+          <p:nvPr/>
+        </p:nvSpPr>
+        <p:spPr>
+          <a:xfrm xmlns:a="http://schemas.openxmlformats.org/drawingml/2006/main">
+            <a:off x="1714500" y="3819525"/>
+            <a:ext cx="9334500" cy="9525"/>
+          </a:xfrm>
+          <a:prstGeom xmlns:a="http://schemas.openxmlformats.org/drawingml/2006/main" prst="rect">
             <a:avLst/>
           </a:prstGeom>
           <a:solidFill xmlns:a="http://schemas.openxmlformats.org/drawingml/2006/main">
-            <a:srgbClr val="2C6E73"/>
+            <a:srgbClr val="D9E0E6"/>
           </a:solidFill>
           <a:ln xmlns:a="http://schemas.openxmlformats.org/drawingml/2006/main" w="0">
-            <a:noFill/>
+            <a:solidFill>
+              <a:srgbClr val="D9E0E6"/>
+            </a:solidFill>
           </a:ln>
         </p:spPr>
       </p:sp>
@@ -8585,19 +8591,19 @@
           <p:cNvPr id="18" name="">
             <a:extLst xmlns:a="http://schemas.openxmlformats.org/drawingml/2006/main">
               <a:ext uri="{FF2B5EF4-FFF2-40B4-BE49-F238E27FC236}">
-                <a16:creationId xmlns:a16="http://schemas.microsoft.com/office/drawing/2014/main" id="{9AF31FB3-CDF7-4BD9-8CAD-8E77B353A67F}"/>
-              </a:ext>
-            </a:extLst>
-          </p:cNvPr>
-          <p:cNvSpPr>
-            <a:spLocks xmlns:a="http://schemas.openxmlformats.org/drawingml/2006/main" noGrp="1"/>
-          </p:cNvSpPr>
-          <p:nvPr/>
-        </p:nvSpPr>
-        <p:spPr>
-          <a:xfrm xmlns:a="http://schemas.openxmlformats.org/drawingml/2006/main">
-            <a:off x="1000125" y="3762375"/>
-            <a:ext cx="476250" cy="419100"/>
+                <a16:creationId xmlns:a16="http://schemas.microsoft.com/office/drawing/2014/main" id="{CF396B52-1968-4BBD-815A-CF35381DEBC4}"/>
+              </a:ext>
+            </a:extLst>
+          </p:cNvPr>
+          <p:cNvSpPr>
+            <a:spLocks xmlns:a="http://schemas.openxmlformats.org/drawingml/2006/main" noGrp="1"/>
+          </p:cNvSpPr>
+          <p:nvPr/>
+        </p:nvSpPr>
+        <p:spPr>
+          <a:xfrm xmlns:a="http://schemas.openxmlformats.org/drawingml/2006/main">
+            <a:off x="1162050" y="3952875"/>
+            <a:ext cx="400050" cy="400050"/>
           </a:xfrm>
           <a:prstGeom xmlns:a="http://schemas.openxmlformats.org/drawingml/2006/main" prst="rect">
             <a:avLst/>
@@ -8614,9 +8620,9 @@
           <a:lstStyle xmlns:a="http://schemas.openxmlformats.org/drawingml/2006/main"/>
           <a:p xmlns:a="http://schemas.openxmlformats.org/drawingml/2006/main">
             <a:pPr algn="ctr">
-              <a:defRPr sz="1350" b="1">
-                <a:solidFill>
-                  <a:srgbClr val="FFFFFF"/>
+              <a:defRPr sz="1125" b="1">
+                <a:solidFill>
+                  <a:srgbClr val="2C6E73"/>
                 </a:solidFill>
                 <a:latin typeface="Arial"/>
                 <a:ea typeface="Arial"/>
@@ -8624,9 +8630,9 @@
               </a:defRPr>
             </a:pPr>
             <a:r>
-              <a:rPr sz="1350" b="1">
-                <a:solidFill>
-                  <a:srgbClr val="FFFFFF"/>
+              <a:rPr sz="1125" b="1">
+                <a:solidFill>
+                  <a:srgbClr val="2C6E73"/>
                 </a:solidFill>
                 <a:latin typeface="Arial"/>
                 <a:ea typeface="Arial"/>
@@ -8642,19 +8648,19 @@
           <p:cNvPr id="19" name="">
             <a:extLst xmlns:a="http://schemas.openxmlformats.org/drawingml/2006/main">
               <a:ext uri="{FF2B5EF4-FFF2-40B4-BE49-F238E27FC236}">
-                <a16:creationId xmlns:a16="http://schemas.microsoft.com/office/drawing/2014/main" id="{C5405F99-AAD4-4409-ABF2-6FC22A14A358}"/>
-              </a:ext>
-            </a:extLst>
-          </p:cNvPr>
-          <p:cNvSpPr>
-            <a:spLocks xmlns:a="http://schemas.openxmlformats.org/drawingml/2006/main" noGrp="1"/>
-          </p:cNvSpPr>
-          <p:nvPr/>
-        </p:nvSpPr>
-        <p:spPr>
-          <a:xfrm xmlns:a="http://schemas.openxmlformats.org/drawingml/2006/main">
-            <a:off x="1714500" y="3667125"/>
-            <a:ext cx="9429750" cy="609600"/>
+                <a16:creationId xmlns:a16="http://schemas.microsoft.com/office/drawing/2014/main" id="{276867B4-2F7D-43BD-968B-6D35D1D179E7}"/>
+              </a:ext>
+            </a:extLst>
+          </p:cNvPr>
+          <p:cNvSpPr>
+            <a:spLocks xmlns:a="http://schemas.openxmlformats.org/drawingml/2006/main" noGrp="1"/>
+          </p:cNvSpPr>
+          <p:nvPr/>
+        </p:nvSpPr>
+        <p:spPr>
+          <a:xfrm xmlns:a="http://schemas.openxmlformats.org/drawingml/2006/main">
+            <a:off x="1714500" y="3867150"/>
+            <a:ext cx="9525000" cy="809625"/>
           </a:xfrm>
           <a:prstGeom xmlns:a="http://schemas.openxmlformats.org/drawingml/2006/main" prst="rect">
             <a:avLst/>
@@ -8671,7 +8677,7 @@
           <a:lstStyle xmlns:a="http://schemas.openxmlformats.org/drawingml/2006/main"/>
           <a:p xmlns:a="http://schemas.openxmlformats.org/drawingml/2006/main">
             <a:pPr algn="l">
-              <a:defRPr sz="1500" b="0">
+              <a:defRPr sz="1725" b="0">
                 <a:solidFill>
                   <a:srgbClr val="17253A"/>
                 </a:solidFill>
@@ -8681,7 +8687,7 @@
               </a:defRPr>
             </a:pPr>
             <a:r>
-              <a:rPr sz="1500" b="0">
+              <a:rPr sz="1725" b="0">
                 <a:solidFill>
                   <a:srgbClr val="17253A"/>
                 </a:solidFill>
@@ -8689,7 +8695,7 @@
                 <a:ea typeface="Arial"/>
                 <a:cs typeface="Arial"/>
               </a:rPr>
-              <a:t>Complete the calculation: 90 degrees.</a:t>
+              <a:t>Sector angle = 1/4 × 360°</a:t>
             </a:r>
           </a:p>
         </p:txBody>
@@ -8699,28 +8705,30 @@
           <p:cNvPr id="20" name="">
             <a:extLst xmlns:a="http://schemas.openxmlformats.org/drawingml/2006/main">
               <a:ext uri="{FF2B5EF4-FFF2-40B4-BE49-F238E27FC236}">
-                <a16:creationId xmlns:a16="http://schemas.microsoft.com/office/drawing/2014/main" id="{554369B3-4933-4CEB-8CC0-5954F78E3B27}"/>
-              </a:ext>
-            </a:extLst>
-          </p:cNvPr>
-          <p:cNvSpPr>
-            <a:spLocks xmlns:a="http://schemas.openxmlformats.org/drawingml/2006/main" noGrp="1"/>
-          </p:cNvSpPr>
-          <p:nvPr/>
-        </p:nvSpPr>
-        <p:spPr>
-          <a:xfrm xmlns:a="http://schemas.openxmlformats.org/drawingml/2006/main">
-            <a:off x="1000125" y="4476750"/>
-            <a:ext cx="476250" cy="476250"/>
-          </a:xfrm>
-          <a:prstGeom xmlns:a="http://schemas.openxmlformats.org/drawingml/2006/main" prst="ellipse">
+                <a16:creationId xmlns:a16="http://schemas.microsoft.com/office/drawing/2014/main" id="{2DD09EF0-6A34-4EA8-B310-B83AA2CE2BB6}"/>
+              </a:ext>
+            </a:extLst>
+          </p:cNvPr>
+          <p:cNvSpPr>
+            <a:spLocks xmlns:a="http://schemas.openxmlformats.org/drawingml/2006/main" noGrp="1"/>
+          </p:cNvSpPr>
+          <p:nvPr/>
+        </p:nvSpPr>
+        <p:spPr>
+          <a:xfrm xmlns:a="http://schemas.openxmlformats.org/drawingml/2006/main">
+            <a:off x="1714500" y="4695825"/>
+            <a:ext cx="9334500" cy="9525"/>
+          </a:xfrm>
+          <a:prstGeom xmlns:a="http://schemas.openxmlformats.org/drawingml/2006/main" prst="rect">
             <a:avLst/>
           </a:prstGeom>
           <a:solidFill xmlns:a="http://schemas.openxmlformats.org/drawingml/2006/main">
-            <a:srgbClr val="2C6E73"/>
+            <a:srgbClr val="D9E0E6"/>
           </a:solidFill>
           <a:ln xmlns:a="http://schemas.openxmlformats.org/drawingml/2006/main" w="0">
-            <a:noFill/>
+            <a:solidFill>
+              <a:srgbClr val="D9E0E6"/>
+            </a:solidFill>
           </a:ln>
         </p:spPr>
       </p:sp>
@@ -8729,19 +8737,19 @@
           <p:cNvPr id="21" name="">
             <a:extLst xmlns:a="http://schemas.openxmlformats.org/drawingml/2006/main">
               <a:ext uri="{FF2B5EF4-FFF2-40B4-BE49-F238E27FC236}">
-                <a16:creationId xmlns:a16="http://schemas.microsoft.com/office/drawing/2014/main" id="{AC107893-842E-4F56-B854-2977E40234B9}"/>
-              </a:ext>
-            </a:extLst>
-          </p:cNvPr>
-          <p:cNvSpPr>
-            <a:spLocks xmlns:a="http://schemas.openxmlformats.org/drawingml/2006/main" noGrp="1"/>
-          </p:cNvSpPr>
-          <p:nvPr/>
-        </p:nvSpPr>
-        <p:spPr>
-          <a:xfrm xmlns:a="http://schemas.openxmlformats.org/drawingml/2006/main">
-            <a:off x="1000125" y="4505325"/>
-            <a:ext cx="476250" cy="419100"/>
+                <a16:creationId xmlns:a16="http://schemas.microsoft.com/office/drawing/2014/main" id="{C0B33D59-3E57-4D5D-90D9-8345705E5E43}"/>
+              </a:ext>
+            </a:extLst>
+          </p:cNvPr>
+          <p:cNvSpPr>
+            <a:spLocks xmlns:a="http://schemas.openxmlformats.org/drawingml/2006/main" noGrp="1"/>
+          </p:cNvSpPr>
+          <p:nvPr/>
+        </p:nvSpPr>
+        <p:spPr>
+          <a:xfrm xmlns:a="http://schemas.openxmlformats.org/drawingml/2006/main">
+            <a:off x="1162050" y="4829175"/>
+            <a:ext cx="400050" cy="400050"/>
           </a:xfrm>
           <a:prstGeom xmlns:a="http://schemas.openxmlformats.org/drawingml/2006/main" prst="rect">
             <a:avLst/>
@@ -8758,9 +8766,9 @@
           <a:lstStyle xmlns:a="http://schemas.openxmlformats.org/drawingml/2006/main"/>
           <a:p xmlns:a="http://schemas.openxmlformats.org/drawingml/2006/main">
             <a:pPr algn="ctr">
-              <a:defRPr sz="1350" b="1">
-                <a:solidFill>
-                  <a:srgbClr val="FFFFFF"/>
+              <a:defRPr sz="1125" b="1">
+                <a:solidFill>
+                  <a:srgbClr val="2F785D"/>
                 </a:solidFill>
                 <a:latin typeface="Arial"/>
                 <a:ea typeface="Arial"/>
@@ -8768,9 +8776,9 @@
               </a:defRPr>
             </a:pPr>
             <a:r>
-              <a:rPr sz="1350" b="1">
-                <a:solidFill>
-                  <a:srgbClr val="FFFFFF"/>
+              <a:rPr sz="1125" b="1">
+                <a:solidFill>
+                  <a:srgbClr val="2F785D"/>
                 </a:solidFill>
                 <a:latin typeface="Arial"/>
                 <a:ea typeface="Arial"/>
@@ -8786,19 +8794,19 @@
           <p:cNvPr id="22" name="">
             <a:extLst xmlns:a="http://schemas.openxmlformats.org/drawingml/2006/main">
               <a:ext uri="{FF2B5EF4-FFF2-40B4-BE49-F238E27FC236}">
-                <a16:creationId xmlns:a16="http://schemas.microsoft.com/office/drawing/2014/main" id="{615EFD38-A3BE-4E11-96FE-9039994350D3}"/>
-              </a:ext>
-            </a:extLst>
-          </p:cNvPr>
-          <p:cNvSpPr>
-            <a:spLocks xmlns:a="http://schemas.openxmlformats.org/drawingml/2006/main" noGrp="1"/>
-          </p:cNvSpPr>
-          <p:nvPr/>
-        </p:nvSpPr>
-        <p:spPr>
-          <a:xfrm xmlns:a="http://schemas.openxmlformats.org/drawingml/2006/main">
-            <a:off x="1714500" y="4410075"/>
-            <a:ext cx="9429750" cy="609600"/>
+                <a16:creationId xmlns:a16="http://schemas.microsoft.com/office/drawing/2014/main" id="{35FDFC8E-2B3F-42C7-85ED-5C7B88195D2B}"/>
+              </a:ext>
+            </a:extLst>
+          </p:cNvPr>
+          <p:cNvSpPr>
+            <a:spLocks xmlns:a="http://schemas.openxmlformats.org/drawingml/2006/main" noGrp="1"/>
+          </p:cNvSpPr>
+          <p:nvPr/>
+        </p:nvSpPr>
+        <p:spPr>
+          <a:xfrm xmlns:a="http://schemas.openxmlformats.org/drawingml/2006/main">
+            <a:off x="1714500" y="4743450"/>
+            <a:ext cx="9525000" cy="809625"/>
           </a:xfrm>
           <a:prstGeom xmlns:a="http://schemas.openxmlformats.org/drawingml/2006/main" prst="rect">
             <a:avLst/>
@@ -8815,7 +8823,7 @@
           <a:lstStyle xmlns:a="http://schemas.openxmlformats.org/drawingml/2006/main"/>
           <a:p xmlns:a="http://schemas.openxmlformats.org/drawingml/2006/main">
             <a:pPr algn="l">
-              <a:defRPr sz="1500" b="1">
+              <a:defRPr sz="1725" b="1">
                 <a:solidFill>
                   <a:srgbClr val="2F785D"/>
                 </a:solidFill>
@@ -8825,7 +8833,7 @@
               </a:defRPr>
             </a:pPr>
             <a:r>
-              <a:rPr sz="1500" b="1">
+              <a:rPr sz="1725" b="1">
                 <a:solidFill>
                   <a:srgbClr val="2F785D"/>
                 </a:solidFill>
@@ -8833,7 +8841,7 @@
                 <a:ea typeface="Arial"/>
                 <a:cs typeface="Arial"/>
               </a:rPr>
-              <a:t>Check the result: State the answer in context and check it against the data range.</a:t>
+              <a:t>90°</a:t>
             </a:r>
           </a:p>
         </p:txBody>
@@ -8841,7 +8849,7 @@
     </p:spTree>
     <p:extLst>
       <p:ext uri="{BB962C8B-B14F-4D97-AF65-F5344CB8AC3E}">
-        <p14:creationId xmlns:p14="http://schemas.microsoft.com/office/powerpoint/2010/main" val="1794701825"/>
+        <p14:creationId xmlns:p14="http://schemas.microsoft.com/office/powerpoint/2010/main" val="193062310"/>
       </p:ext>
     </p:extLst>
   </p:cSld>
@@ -9134,7 +9142,7 @@
           <p:cNvPr id="15" name="">
             <a:extLst xmlns:a="http://schemas.openxmlformats.org/drawingml/2006/main">
               <a:ext uri="{FF2B5EF4-FFF2-40B4-BE49-F238E27FC236}">
-                <a16:creationId xmlns:a16="http://schemas.microsoft.com/office/drawing/2014/main" id="{CABC0045-BD42-4481-9E30-1944C31A5C73}"/>
+                <a16:creationId xmlns:a16="http://schemas.microsoft.com/office/drawing/2014/main" id="{BCF706C3-519A-468D-A9EA-1ECDCDD9ECC3}"/>
               </a:ext>
             </a:extLst>
           </p:cNvPr>
@@ -9166,7 +9174,7 @@
           <p:cNvPr id="2" name="">
             <a:extLst xmlns:a="http://schemas.openxmlformats.org/drawingml/2006/main">
               <a:ext uri="{FF2B5EF4-FFF2-40B4-BE49-F238E27FC236}">
-                <a16:creationId xmlns:a16="http://schemas.microsoft.com/office/drawing/2014/main" id="{70F38AA3-AB7F-4224-BBFA-88D4F6CAC571}"/>
+                <a16:creationId xmlns:a16="http://schemas.microsoft.com/office/drawing/2014/main" id="{44656322-1846-46C5-B1EA-E54F3C30C696}"/>
               </a:ext>
             </a:extLst>
           </p:cNvPr>
@@ -9223,7 +9231,7 @@
           <p:cNvPr id="3" name="">
             <a:extLst xmlns:a="http://schemas.openxmlformats.org/drawingml/2006/main">
               <a:ext uri="{FF2B5EF4-FFF2-40B4-BE49-F238E27FC236}">
-                <a16:creationId xmlns:a16="http://schemas.microsoft.com/office/drawing/2014/main" id="{27FEFCAF-5EF1-4131-95E8-8EC282F40B77}"/>
+                <a16:creationId xmlns:a16="http://schemas.microsoft.com/office/drawing/2014/main" id="{7571D0DB-6848-4FC6-922C-40D72C69DC45}"/>
               </a:ext>
             </a:extLst>
           </p:cNvPr>
@@ -9255,7 +9263,7 @@
           <p:cNvPr id="4" name="">
             <a:extLst xmlns:a="http://schemas.openxmlformats.org/drawingml/2006/main">
               <a:ext uri="{FF2B5EF4-FFF2-40B4-BE49-F238E27FC236}">
-                <a16:creationId xmlns:a16="http://schemas.microsoft.com/office/drawing/2014/main" id="{17331ABF-AEA0-4C7D-AC2A-075D242BF5EA}"/>
+                <a16:creationId xmlns:a16="http://schemas.microsoft.com/office/drawing/2014/main" id="{AA1115FF-2245-4312-98CF-7781712E92A8}"/>
               </a:ext>
             </a:extLst>
           </p:cNvPr>
@@ -9312,7 +9320,7 @@
           <p:cNvPr id="5" name="">
             <a:extLst xmlns:a="http://schemas.openxmlformats.org/drawingml/2006/main">
               <a:ext uri="{FF2B5EF4-FFF2-40B4-BE49-F238E27FC236}">
-                <a16:creationId xmlns:a16="http://schemas.microsoft.com/office/drawing/2014/main" id="{42AE4BBB-9A7D-455C-B8B2-A554769B6700}"/>
+                <a16:creationId xmlns:a16="http://schemas.microsoft.com/office/drawing/2014/main" id="{3EB1BE2E-881D-4B7D-8769-ED7693BCE850}"/>
               </a:ext>
             </a:extLst>
           </p:cNvPr>
@@ -9369,7 +9377,7 @@
           <p:cNvPr id="6" name="">
             <a:extLst xmlns:a="http://schemas.openxmlformats.org/drawingml/2006/main">
               <a:ext uri="{FF2B5EF4-FFF2-40B4-BE49-F238E27FC236}">
-                <a16:creationId xmlns:a16="http://schemas.microsoft.com/office/drawing/2014/main" id="{16C7977F-1073-4966-B1F5-08A979B5BA4A}"/>
+                <a16:creationId xmlns:a16="http://schemas.microsoft.com/office/drawing/2014/main" id="{9BCACFA9-F330-40F3-AB4E-9C4FEB51761D}"/>
               </a:ext>
             </a:extLst>
           </p:cNvPr>
@@ -9426,7 +9434,7 @@
           <p:cNvPr id="7" name="">
             <a:extLst xmlns:a="http://schemas.openxmlformats.org/drawingml/2006/main">
               <a:ext uri="{FF2B5EF4-FFF2-40B4-BE49-F238E27FC236}">
-                <a16:creationId xmlns:a16="http://schemas.microsoft.com/office/drawing/2014/main" id="{5A05A851-F7C2-4241-89D9-B7C447E57859}"/>
+                <a16:creationId xmlns:a16="http://schemas.microsoft.com/office/drawing/2014/main" id="{E0385296-7A3A-4E4E-8CC6-7B5B37E61660}"/>
               </a:ext>
             </a:extLst>
           </p:cNvPr>
@@ -9458,7 +9466,7 @@
           <p:cNvPr id="8" name="">
             <a:extLst xmlns:a="http://schemas.openxmlformats.org/drawingml/2006/main">
               <a:ext uri="{FF2B5EF4-FFF2-40B4-BE49-F238E27FC236}">
-                <a16:creationId xmlns:a16="http://schemas.microsoft.com/office/drawing/2014/main" id="{370D7510-8480-4439-BD67-F7EC33B9E0DC}"/>
+                <a16:creationId xmlns:a16="http://schemas.microsoft.com/office/drawing/2014/main" id="{00A2E758-1378-4A4E-BC6D-7ACA65F9A039}"/>
               </a:ext>
             </a:extLst>
           </p:cNvPr>
@@ -9515,7 +9523,7 @@
           <p:cNvPr id="9" name="">
             <a:extLst xmlns:a="http://schemas.openxmlformats.org/drawingml/2006/main">
               <a:ext uri="{FF2B5EF4-FFF2-40B4-BE49-F238E27FC236}">
-                <a16:creationId xmlns:a16="http://schemas.microsoft.com/office/drawing/2014/main" id="{FD51E782-CF16-4136-957E-1C59D62C3C15}"/>
+                <a16:creationId xmlns:a16="http://schemas.microsoft.com/office/drawing/2014/main" id="{5E472842-6990-4D57-B679-0842B2F5036B}"/>
               </a:ext>
             </a:extLst>
           </p:cNvPr>
@@ -9572,7 +9580,7 @@
           <p:cNvPr id="10" name="">
             <a:extLst xmlns:a="http://schemas.openxmlformats.org/drawingml/2006/main">
               <a:ext uri="{FF2B5EF4-FFF2-40B4-BE49-F238E27FC236}">
-                <a16:creationId xmlns:a16="http://schemas.microsoft.com/office/drawing/2014/main" id="{606335B0-FFA3-453C-9875-E5BA57007EF9}"/>
+                <a16:creationId xmlns:a16="http://schemas.microsoft.com/office/drawing/2014/main" id="{7D36A364-A6DA-4732-AC75-DD39E66531E3}"/>
               </a:ext>
             </a:extLst>
           </p:cNvPr>
@@ -9629,7 +9637,7 @@
           <p:cNvPr id="11" name="">
             <a:extLst xmlns:a="http://schemas.openxmlformats.org/drawingml/2006/main">
               <a:ext uri="{FF2B5EF4-FFF2-40B4-BE49-F238E27FC236}">
-                <a16:creationId xmlns:a16="http://schemas.microsoft.com/office/drawing/2014/main" id="{644D7717-C76D-4303-8E88-83EAD9B957A3}"/>
+                <a16:creationId xmlns:a16="http://schemas.microsoft.com/office/drawing/2014/main" id="{60DE93F7-EF0F-4FB4-AC80-47AE438E79B6}"/>
               </a:ext>
             </a:extLst>
           </p:cNvPr>
@@ -9686,7 +9694,7 @@
           <p:cNvPr id="12" name="">
             <a:extLst xmlns:a="http://schemas.openxmlformats.org/drawingml/2006/main">
               <a:ext uri="{FF2B5EF4-FFF2-40B4-BE49-F238E27FC236}">
-                <a16:creationId xmlns:a16="http://schemas.microsoft.com/office/drawing/2014/main" id="{E49C301E-2BE9-403D-B802-5BF1FCCD9F1B}"/>
+                <a16:creationId xmlns:a16="http://schemas.microsoft.com/office/drawing/2014/main" id="{5EF41E20-0D44-4811-B10D-65B47933D865}"/>
               </a:ext>
             </a:extLst>
           </p:cNvPr>
@@ -9718,7 +9726,7 @@
           <p:cNvPr id="13" name="">
             <a:extLst xmlns:a="http://schemas.openxmlformats.org/drawingml/2006/main">
               <a:ext uri="{FF2B5EF4-FFF2-40B4-BE49-F238E27FC236}">
-                <a16:creationId xmlns:a16="http://schemas.microsoft.com/office/drawing/2014/main" id="{05BEF13C-6F52-4D9F-BE40-DCFF15129B6B}"/>
+                <a16:creationId xmlns:a16="http://schemas.microsoft.com/office/drawing/2014/main" id="{291E674E-DFBB-42F2-9CAC-39A55DBE2856}"/>
               </a:ext>
             </a:extLst>
           </p:cNvPr>
@@ -9775,7 +9783,7 @@
           <p:cNvPr id="14" name="">
             <a:extLst xmlns:a="http://schemas.openxmlformats.org/drawingml/2006/main">
               <a:ext uri="{FF2B5EF4-FFF2-40B4-BE49-F238E27FC236}">
-                <a16:creationId xmlns:a16="http://schemas.microsoft.com/office/drawing/2014/main" id="{99212AAA-F696-4C64-8774-79957199476C}"/>
+                <a16:creationId xmlns:a16="http://schemas.microsoft.com/office/drawing/2014/main" id="{4976D823-2B66-4D70-A07C-F6387A611791}"/>
               </a:ext>
             </a:extLst>
           </p:cNvPr>
@@ -9830,7 +9838,7 @@
     </p:spTree>
     <p:extLst>
       <p:ext uri="{BB962C8B-B14F-4D97-AF65-F5344CB8AC3E}">
-        <p14:creationId xmlns:p14="http://schemas.microsoft.com/office/powerpoint/2010/main" val="678349582"/>
+        <p14:creationId xmlns:p14="http://schemas.microsoft.com/office/powerpoint/2010/main" val="1742984671"/>
       </p:ext>
     </p:extLst>
   </p:cSld>
@@ -10031,7 +10039,7 @@
           <p:cNvPr id="16" name="">
             <a:extLst xmlns:a="http://schemas.openxmlformats.org/drawingml/2006/main">
               <a:ext uri="{FF2B5EF4-FFF2-40B4-BE49-F238E27FC236}">
-                <a16:creationId xmlns:a16="http://schemas.microsoft.com/office/drawing/2014/main" id="{39FB216D-DA2F-4991-B014-04B66FC4185A}"/>
+                <a16:creationId xmlns:a16="http://schemas.microsoft.com/office/drawing/2014/main" id="{F4EA3BC5-FC47-4BA7-9528-673640207A3D}"/>
               </a:ext>
             </a:extLst>
           </p:cNvPr>
@@ -10063,7 +10071,7 @@
           <p:cNvPr id="2" name="">
             <a:extLst xmlns:a="http://schemas.openxmlformats.org/drawingml/2006/main">
               <a:ext uri="{FF2B5EF4-FFF2-40B4-BE49-F238E27FC236}">
-                <a16:creationId xmlns:a16="http://schemas.microsoft.com/office/drawing/2014/main" id="{833936C7-9B05-43C8-9BDF-B2897CC16CD3}"/>
+                <a16:creationId xmlns:a16="http://schemas.microsoft.com/office/drawing/2014/main" id="{9C439018-8930-45A3-97B0-6DCD5E128B8A}"/>
               </a:ext>
             </a:extLst>
           </p:cNvPr>
@@ -10120,7 +10128,7 @@
           <p:cNvPr id="3" name="">
             <a:extLst xmlns:a="http://schemas.openxmlformats.org/drawingml/2006/main">
               <a:ext uri="{FF2B5EF4-FFF2-40B4-BE49-F238E27FC236}">
-                <a16:creationId xmlns:a16="http://schemas.microsoft.com/office/drawing/2014/main" id="{76B6C91A-FCD0-429B-A231-551A89CC3D84}"/>
+                <a16:creationId xmlns:a16="http://schemas.microsoft.com/office/drawing/2014/main" id="{32C7D70F-B61C-4DCB-A5CE-9B97749B9E42}"/>
               </a:ext>
             </a:extLst>
           </p:cNvPr>
@@ -10152,7 +10160,7 @@
           <p:cNvPr id="4" name="">
             <a:extLst xmlns:a="http://schemas.openxmlformats.org/drawingml/2006/main">
               <a:ext uri="{FF2B5EF4-FFF2-40B4-BE49-F238E27FC236}">
-                <a16:creationId xmlns:a16="http://schemas.microsoft.com/office/drawing/2014/main" id="{A606E50B-71C0-43C0-8F04-F7B81C9C8305}"/>
+                <a16:creationId xmlns:a16="http://schemas.microsoft.com/office/drawing/2014/main" id="{433FF82B-F6AC-4522-956B-D95C745A7822}"/>
               </a:ext>
             </a:extLst>
           </p:cNvPr>
@@ -10209,7 +10217,7 @@
           <p:cNvPr id="5" name="">
             <a:extLst xmlns:a="http://schemas.openxmlformats.org/drawingml/2006/main">
               <a:ext uri="{FF2B5EF4-FFF2-40B4-BE49-F238E27FC236}">
-                <a16:creationId xmlns:a16="http://schemas.microsoft.com/office/drawing/2014/main" id="{B549D63F-B95C-4BC5-B060-292CD44C5A00}"/>
+                <a16:creationId xmlns:a16="http://schemas.microsoft.com/office/drawing/2014/main" id="{E888E33E-85DE-407B-A1B3-89CBE528B436}"/>
               </a:ext>
             </a:extLst>
           </p:cNvPr>
@@ -10266,7 +10274,7 @@
           <p:cNvPr id="6" name="">
             <a:extLst xmlns:a="http://schemas.openxmlformats.org/drawingml/2006/main">
               <a:ext uri="{FF2B5EF4-FFF2-40B4-BE49-F238E27FC236}">
-                <a16:creationId xmlns:a16="http://schemas.microsoft.com/office/drawing/2014/main" id="{69FEC69F-0F58-4E43-8906-AB1CE1352BE1}"/>
+                <a16:creationId xmlns:a16="http://schemas.microsoft.com/office/drawing/2014/main" id="{31EFF068-2357-4DB2-B945-293C8B299DD6}"/>
               </a:ext>
             </a:extLst>
           </p:cNvPr>
@@ -10323,7 +10331,7 @@
           <p:cNvPr id="7" name="">
             <a:extLst xmlns:a="http://schemas.openxmlformats.org/drawingml/2006/main">
               <a:ext uri="{FF2B5EF4-FFF2-40B4-BE49-F238E27FC236}">
-                <a16:creationId xmlns:a16="http://schemas.microsoft.com/office/drawing/2014/main" id="{D98C86DB-2911-4B30-BDBE-880ABDE9CF15}"/>
+                <a16:creationId xmlns:a16="http://schemas.microsoft.com/office/drawing/2014/main" id="{D0C3AB7C-3E69-410B-9BD0-FC841686AF19}"/>
               </a:ext>
             </a:extLst>
           </p:cNvPr>
@@ -10355,7 +10363,7 @@
           <p:cNvPr id="8" name="">
             <a:extLst xmlns:a="http://schemas.openxmlformats.org/drawingml/2006/main">
               <a:ext uri="{FF2B5EF4-FFF2-40B4-BE49-F238E27FC236}">
-                <a16:creationId xmlns:a16="http://schemas.microsoft.com/office/drawing/2014/main" id="{B3CEA29B-9D3E-4311-A213-00E619D90CBD}"/>
+                <a16:creationId xmlns:a16="http://schemas.microsoft.com/office/drawing/2014/main" id="{072F6D0A-5037-40BF-B8DD-440C3CC047FE}"/>
               </a:ext>
             </a:extLst>
           </p:cNvPr>
@@ -10412,7 +10420,7 @@
           <p:cNvPr id="9" name="">
             <a:extLst xmlns:a="http://schemas.openxmlformats.org/drawingml/2006/main">
               <a:ext uri="{FF2B5EF4-FFF2-40B4-BE49-F238E27FC236}">
-                <a16:creationId xmlns:a16="http://schemas.microsoft.com/office/drawing/2014/main" id="{5B7575D8-C2D4-4273-AE8C-5A7B200E6316}"/>
+                <a16:creationId xmlns:a16="http://schemas.microsoft.com/office/drawing/2014/main" id="{416A6DA2-202E-41D1-9CB1-73CD3E4D0B26}"/>
               </a:ext>
             </a:extLst>
           </p:cNvPr>
@@ -10469,7 +10477,7 @@
           <p:cNvPr id="10" name="">
             <a:extLst xmlns:a="http://schemas.openxmlformats.org/drawingml/2006/main">
               <a:ext uri="{FF2B5EF4-FFF2-40B4-BE49-F238E27FC236}">
-                <a16:creationId xmlns:a16="http://schemas.microsoft.com/office/drawing/2014/main" id="{04AC7C91-4ED8-4EC6-AA2A-4423384F6D5F}"/>
+                <a16:creationId xmlns:a16="http://schemas.microsoft.com/office/drawing/2014/main" id="{416B84A2-9E38-4424-9BCF-331B6EE93CEE}"/>
               </a:ext>
             </a:extLst>
           </p:cNvPr>
@@ -10526,7 +10534,7 @@
           <p:cNvPr id="11" name="">
             <a:extLst xmlns:a="http://schemas.openxmlformats.org/drawingml/2006/main">
               <a:ext uri="{FF2B5EF4-FFF2-40B4-BE49-F238E27FC236}">
-                <a16:creationId xmlns:a16="http://schemas.microsoft.com/office/drawing/2014/main" id="{2AA1890F-67A2-4FD5-80DA-03758F38490E}"/>
+                <a16:creationId xmlns:a16="http://schemas.microsoft.com/office/drawing/2014/main" id="{C7E60614-25B8-4A35-998F-8BD8B05AA150}"/>
               </a:ext>
             </a:extLst>
           </p:cNvPr>
@@ -10583,7 +10591,7 @@
           <p:cNvPr id="12" name="">
             <a:extLst xmlns:a="http://schemas.openxmlformats.org/drawingml/2006/main">
               <a:ext uri="{FF2B5EF4-FFF2-40B4-BE49-F238E27FC236}">
-                <a16:creationId xmlns:a16="http://schemas.microsoft.com/office/drawing/2014/main" id="{21DD6075-2D1F-4997-894F-633C99B616EE}"/>
+                <a16:creationId xmlns:a16="http://schemas.microsoft.com/office/drawing/2014/main" id="{F84C929D-337A-444E-A53F-BD496A8BCDF5}"/>
               </a:ext>
             </a:extLst>
           </p:cNvPr>
@@ -10640,7 +10648,7 @@
           <p:cNvPr id="13" name="">
             <a:extLst xmlns:a="http://schemas.openxmlformats.org/drawingml/2006/main">
               <a:ext uri="{FF2B5EF4-FFF2-40B4-BE49-F238E27FC236}">
-                <a16:creationId xmlns:a16="http://schemas.microsoft.com/office/drawing/2014/main" id="{72797E03-3BB6-42B2-A3E2-AF94EF63E94C}"/>
+                <a16:creationId xmlns:a16="http://schemas.microsoft.com/office/drawing/2014/main" id="{C82EDDCA-6780-4F87-9EE2-117C916E30F3}"/>
               </a:ext>
             </a:extLst>
           </p:cNvPr>
@@ -10697,7 +10705,7 @@
           <p:cNvPr id="14" name="">
             <a:extLst xmlns:a="http://schemas.openxmlformats.org/drawingml/2006/main">
               <a:ext uri="{FF2B5EF4-FFF2-40B4-BE49-F238E27FC236}">
-                <a16:creationId xmlns:a16="http://schemas.microsoft.com/office/drawing/2014/main" id="{F6B2597C-C9C8-4306-A176-D77C96140E1E}"/>
+                <a16:creationId xmlns:a16="http://schemas.microsoft.com/office/drawing/2014/main" id="{13A35181-BD5D-4D85-98F2-4FE8D76EC2ED}"/>
               </a:ext>
             </a:extLst>
           </p:cNvPr>
@@ -10754,7 +10762,7 @@
           <p:cNvPr id="15" name="">
             <a:extLst xmlns:a="http://schemas.openxmlformats.org/drawingml/2006/main">
               <a:ext uri="{FF2B5EF4-FFF2-40B4-BE49-F238E27FC236}">
-                <a16:creationId xmlns:a16="http://schemas.microsoft.com/office/drawing/2014/main" id="{B3E9F1D7-9A64-4D8E-94B3-617680E01512}"/>
+                <a16:creationId xmlns:a16="http://schemas.microsoft.com/office/drawing/2014/main" id="{5D4EEABC-E144-4063-8FCB-5ED68F14EE9C}"/>
               </a:ext>
             </a:extLst>
           </p:cNvPr>
@@ -10809,7 +10817,7 @@
     </p:spTree>
     <p:extLst>
       <p:ext uri="{BB962C8B-B14F-4D97-AF65-F5344CB8AC3E}">
-        <p14:creationId xmlns:p14="http://schemas.microsoft.com/office/powerpoint/2010/main" val="352005804"/>
+        <p14:creationId xmlns:p14="http://schemas.microsoft.com/office/powerpoint/2010/main" val="531937255"/>
       </p:ext>
     </p:extLst>
   </p:cSld>
@@ -10964,7 +10972,7 @@
           <p:cNvPr id="16" name="">
             <a:extLst xmlns:a="http://schemas.openxmlformats.org/drawingml/2006/main">
               <a:ext uri="{FF2B5EF4-FFF2-40B4-BE49-F238E27FC236}">
-                <a16:creationId xmlns:a16="http://schemas.microsoft.com/office/drawing/2014/main" id="{F17CF0CA-1CA0-4235-90C1-FDF65E08084E}"/>
+                <a16:creationId xmlns:a16="http://schemas.microsoft.com/office/drawing/2014/main" id="{9A4D55B9-71CD-4DB6-A105-C178B181A374}"/>
               </a:ext>
             </a:extLst>
           </p:cNvPr>
@@ -10996,7 +11004,7 @@
           <p:cNvPr id="2" name="">
             <a:extLst xmlns:a="http://schemas.openxmlformats.org/drawingml/2006/main">
               <a:ext uri="{FF2B5EF4-FFF2-40B4-BE49-F238E27FC236}">
-                <a16:creationId xmlns:a16="http://schemas.microsoft.com/office/drawing/2014/main" id="{E701F09E-A605-4311-9133-42D566C85D3B}"/>
+                <a16:creationId xmlns:a16="http://schemas.microsoft.com/office/drawing/2014/main" id="{4729575D-1822-46F1-8FB6-76F076567C12}"/>
               </a:ext>
             </a:extLst>
           </p:cNvPr>
@@ -11053,7 +11061,7 @@
           <p:cNvPr id="3" name="">
             <a:extLst xmlns:a="http://schemas.openxmlformats.org/drawingml/2006/main">
               <a:ext uri="{FF2B5EF4-FFF2-40B4-BE49-F238E27FC236}">
-                <a16:creationId xmlns:a16="http://schemas.microsoft.com/office/drawing/2014/main" id="{660EC8B4-9602-42B9-BA24-3E3DBCA3058A}"/>
+                <a16:creationId xmlns:a16="http://schemas.microsoft.com/office/drawing/2014/main" id="{1C7E81F7-C71E-43B9-A9E9-6F407110698A}"/>
               </a:ext>
             </a:extLst>
           </p:cNvPr>
@@ -11085,7 +11093,7 @@
           <p:cNvPr id="4" name="">
             <a:extLst xmlns:a="http://schemas.openxmlformats.org/drawingml/2006/main">
               <a:ext uri="{FF2B5EF4-FFF2-40B4-BE49-F238E27FC236}">
-                <a16:creationId xmlns:a16="http://schemas.microsoft.com/office/drawing/2014/main" id="{BA163776-ACC8-484F-A5E4-8F75F34D1A69}"/>
+                <a16:creationId xmlns:a16="http://schemas.microsoft.com/office/drawing/2014/main" id="{50BE8A42-2AFC-4568-924E-A6063C376FAF}"/>
               </a:ext>
             </a:extLst>
           </p:cNvPr>
@@ -11142,7 +11150,7 @@
           <p:cNvPr id="5" name="">
             <a:extLst xmlns:a="http://schemas.openxmlformats.org/drawingml/2006/main">
               <a:ext uri="{FF2B5EF4-FFF2-40B4-BE49-F238E27FC236}">
-                <a16:creationId xmlns:a16="http://schemas.microsoft.com/office/drawing/2014/main" id="{ABF25A7C-63C3-4FC4-A721-AC36F0368126}"/>
+                <a16:creationId xmlns:a16="http://schemas.microsoft.com/office/drawing/2014/main" id="{1D596ED9-9CD0-4C25-8B75-5B3CA549E247}"/>
               </a:ext>
             </a:extLst>
           </p:cNvPr>
@@ -11199,7 +11207,7 @@
           <p:cNvPr id="6" name="">
             <a:extLst xmlns:a="http://schemas.openxmlformats.org/drawingml/2006/main">
               <a:ext uri="{FF2B5EF4-FFF2-40B4-BE49-F238E27FC236}">
-                <a16:creationId xmlns:a16="http://schemas.microsoft.com/office/drawing/2014/main" id="{14128004-7B23-41CB-A259-89589CAF0C2C}"/>
+                <a16:creationId xmlns:a16="http://schemas.microsoft.com/office/drawing/2014/main" id="{E562D57C-3624-4333-854D-0910612D87FF}"/>
               </a:ext>
             </a:extLst>
           </p:cNvPr>
@@ -11256,7 +11264,7 @@
           <p:cNvPr id="7" name="">
             <a:extLst xmlns:a="http://schemas.openxmlformats.org/drawingml/2006/main">
               <a:ext uri="{FF2B5EF4-FFF2-40B4-BE49-F238E27FC236}">
-                <a16:creationId xmlns:a16="http://schemas.microsoft.com/office/drawing/2014/main" id="{45BC5E5D-8284-49F6-B596-8981BBD911D7}"/>
+                <a16:creationId xmlns:a16="http://schemas.microsoft.com/office/drawing/2014/main" id="{FCFF6BD6-6236-4799-9E70-2F5B665EF773}"/>
               </a:ext>
             </a:extLst>
           </p:cNvPr>
@@ -11288,7 +11296,7 @@
           <p:cNvPr id="8" name="">
             <a:extLst xmlns:a="http://schemas.openxmlformats.org/drawingml/2006/main">
               <a:ext uri="{FF2B5EF4-FFF2-40B4-BE49-F238E27FC236}">
-                <a16:creationId xmlns:a16="http://schemas.microsoft.com/office/drawing/2014/main" id="{CB5EED7A-8218-4F75-8791-5B3A31126CC4}"/>
+                <a16:creationId xmlns:a16="http://schemas.microsoft.com/office/drawing/2014/main" id="{81008B4E-5C4B-499A-BA8B-A7379579566E}"/>
               </a:ext>
             </a:extLst>
           </p:cNvPr>
@@ -11345,7 +11353,7 @@
           <p:cNvPr id="9" name="">
             <a:extLst xmlns:a="http://schemas.openxmlformats.org/drawingml/2006/main">
               <a:ext uri="{FF2B5EF4-FFF2-40B4-BE49-F238E27FC236}">
-                <a16:creationId xmlns:a16="http://schemas.microsoft.com/office/drawing/2014/main" id="{3231FDB2-AE13-4722-9C7C-1B886D1E3944}"/>
+                <a16:creationId xmlns:a16="http://schemas.microsoft.com/office/drawing/2014/main" id="{A72DFC29-40F7-4AFB-A201-49284D48B450}"/>
               </a:ext>
             </a:extLst>
           </p:cNvPr>
@@ -11406,7 +11414,7 @@
           <p:nvPr/>
         </p:nvPicPr>
         <p:blipFill>
-          <a:blip xmlns:r="http://schemas.openxmlformats.org/officeDocument/2006/relationships" xmlns:a="http://schemas.openxmlformats.org/drawingml/2006/main" r:embed="R47a5e052c97f41e3"/>
+          <a:blip xmlns:r="http://schemas.openxmlformats.org/officeDocument/2006/relationships" xmlns:a="http://schemas.openxmlformats.org/drawingml/2006/main" r:embed="Ra5c5b6ef89e74e30"/>
           <a:stretch xmlns:a="http://schemas.openxmlformats.org/drawingml/2006/main"/>
         </p:blipFill>
         <p:spPr>
@@ -11424,7 +11432,7 @@
           <p:cNvPr id="11" name="">
             <a:extLst xmlns:a="http://schemas.openxmlformats.org/drawingml/2006/main">
               <a:ext uri="{FF2B5EF4-FFF2-40B4-BE49-F238E27FC236}">
-                <a16:creationId xmlns:a16="http://schemas.microsoft.com/office/drawing/2014/main" id="{0000B3EE-8F53-4D90-8839-4972EB02BDEA}"/>
+                <a16:creationId xmlns:a16="http://schemas.microsoft.com/office/drawing/2014/main" id="{F527808E-7A29-4FF6-84B8-D9AAAE0A6796}"/>
               </a:ext>
             </a:extLst>
           </p:cNvPr>
@@ -11481,7 +11489,7 @@
           <p:cNvPr id="12" name="">
             <a:extLst xmlns:a="http://schemas.openxmlformats.org/drawingml/2006/main">
               <a:ext uri="{FF2B5EF4-FFF2-40B4-BE49-F238E27FC236}">
-                <a16:creationId xmlns:a16="http://schemas.microsoft.com/office/drawing/2014/main" id="{9776AED1-AC7F-4BF6-A49E-C1DE1148B804}"/>
+                <a16:creationId xmlns:a16="http://schemas.microsoft.com/office/drawing/2014/main" id="{3C616276-4D64-4885-A251-A59362AD46E6}"/>
               </a:ext>
             </a:extLst>
           </p:cNvPr>
@@ -11538,7 +11546,7 @@
           <p:cNvPr id="13" name="">
             <a:extLst xmlns:a="http://schemas.openxmlformats.org/drawingml/2006/main">
               <a:ext uri="{FF2B5EF4-FFF2-40B4-BE49-F238E27FC236}">
-                <a16:creationId xmlns:a16="http://schemas.microsoft.com/office/drawing/2014/main" id="{DDDFC97B-F896-49D1-A4A5-49C66F6E5DB0}"/>
+                <a16:creationId xmlns:a16="http://schemas.microsoft.com/office/drawing/2014/main" id="{6CDCA2BA-A2CA-4373-9A63-63ED9BB7BB10}"/>
               </a:ext>
             </a:extLst>
           </p:cNvPr>
@@ -11570,7 +11578,7 @@
           <p:cNvPr id="14" name="">
             <a:extLst xmlns:a="http://schemas.openxmlformats.org/drawingml/2006/main">
               <a:ext uri="{FF2B5EF4-FFF2-40B4-BE49-F238E27FC236}">
-                <a16:creationId xmlns:a16="http://schemas.microsoft.com/office/drawing/2014/main" id="{4FD8E422-EE78-4D6A-BE6B-03A3BA8F9AA1}"/>
+                <a16:creationId xmlns:a16="http://schemas.microsoft.com/office/drawing/2014/main" id="{7D1F5C15-5242-4F06-BF77-624DDA3AB0EF}"/>
               </a:ext>
             </a:extLst>
           </p:cNvPr>
@@ -11627,7 +11635,7 @@
           <p:cNvPr id="15" name="">
             <a:extLst xmlns:a="http://schemas.openxmlformats.org/drawingml/2006/main">
               <a:ext uri="{FF2B5EF4-FFF2-40B4-BE49-F238E27FC236}">
-                <a16:creationId xmlns:a16="http://schemas.microsoft.com/office/drawing/2014/main" id="{3FCF5B0C-337C-430B-BA1C-7700162DEAE9}"/>
+                <a16:creationId xmlns:a16="http://schemas.microsoft.com/office/drawing/2014/main" id="{F874043E-7FA7-4BF8-8639-9996CC6AC798}"/>
               </a:ext>
             </a:extLst>
           </p:cNvPr>
@@ -11682,7 +11690,7 @@
     </p:spTree>
     <p:extLst>
       <p:ext uri="{BB962C8B-B14F-4D97-AF65-F5344CB8AC3E}">
-        <p14:creationId xmlns:p14="http://schemas.microsoft.com/office/powerpoint/2010/main" val="239610469"/>
+        <p14:creationId xmlns:p14="http://schemas.microsoft.com/office/powerpoint/2010/main" val="1793039652"/>
       </p:ext>
     </p:extLst>
   </p:cSld>
@@ -11837,7 +11845,7 @@
           <p:cNvPr id="23" name="">
             <a:extLst xmlns:a="http://schemas.openxmlformats.org/drawingml/2006/main">
               <a:ext uri="{FF2B5EF4-FFF2-40B4-BE49-F238E27FC236}">
-                <a16:creationId xmlns:a16="http://schemas.microsoft.com/office/drawing/2014/main" id="{3F4960CA-416A-4729-AC43-914A5A908BBE}"/>
+                <a16:creationId xmlns:a16="http://schemas.microsoft.com/office/drawing/2014/main" id="{36743BD6-54C2-469B-BC91-39A094D69FB9}"/>
               </a:ext>
             </a:extLst>
           </p:cNvPr>
@@ -11869,7 +11877,7 @@
           <p:cNvPr id="2" name="">
             <a:extLst xmlns:a="http://schemas.openxmlformats.org/drawingml/2006/main">
               <a:ext uri="{FF2B5EF4-FFF2-40B4-BE49-F238E27FC236}">
-                <a16:creationId xmlns:a16="http://schemas.microsoft.com/office/drawing/2014/main" id="{41EF0A4D-D84F-49AC-841A-027EC7FD90DE}"/>
+                <a16:creationId xmlns:a16="http://schemas.microsoft.com/office/drawing/2014/main" id="{7B5EEB96-7359-471B-AA49-FA6B251F6EFE}"/>
               </a:ext>
             </a:extLst>
           </p:cNvPr>
@@ -11926,7 +11934,7 @@
           <p:cNvPr id="3" name="">
             <a:extLst xmlns:a="http://schemas.openxmlformats.org/drawingml/2006/main">
               <a:ext uri="{FF2B5EF4-FFF2-40B4-BE49-F238E27FC236}">
-                <a16:creationId xmlns:a16="http://schemas.microsoft.com/office/drawing/2014/main" id="{5D73C6CE-8C2C-403E-9D25-150DC03A4FDF}"/>
+                <a16:creationId xmlns:a16="http://schemas.microsoft.com/office/drawing/2014/main" id="{9E851F02-3742-4D91-A684-53C97D3EDC37}"/>
               </a:ext>
             </a:extLst>
           </p:cNvPr>
@@ -11958,7 +11966,7 @@
           <p:cNvPr id="4" name="">
             <a:extLst xmlns:a="http://schemas.openxmlformats.org/drawingml/2006/main">
               <a:ext uri="{FF2B5EF4-FFF2-40B4-BE49-F238E27FC236}">
-                <a16:creationId xmlns:a16="http://schemas.microsoft.com/office/drawing/2014/main" id="{F1CDE309-148D-4A5B-963D-3F5FF2612D25}"/>
+                <a16:creationId xmlns:a16="http://schemas.microsoft.com/office/drawing/2014/main" id="{7C18A926-E6CD-4C7D-9F9B-273194F74454}"/>
               </a:ext>
             </a:extLst>
           </p:cNvPr>
@@ -12015,7 +12023,7 @@
           <p:cNvPr id="5" name="">
             <a:extLst xmlns:a="http://schemas.openxmlformats.org/drawingml/2006/main">
               <a:ext uri="{FF2B5EF4-FFF2-40B4-BE49-F238E27FC236}">
-                <a16:creationId xmlns:a16="http://schemas.microsoft.com/office/drawing/2014/main" id="{C55C96E0-D0D8-4202-870F-25DA201F1515}"/>
+                <a16:creationId xmlns:a16="http://schemas.microsoft.com/office/drawing/2014/main" id="{E15F80F3-18C1-4468-BCD9-78838BD84A87}"/>
               </a:ext>
             </a:extLst>
           </p:cNvPr>
@@ -12072,7 +12080,7 @@
           <p:cNvPr id="6" name="">
             <a:extLst xmlns:a="http://schemas.openxmlformats.org/drawingml/2006/main">
               <a:ext uri="{FF2B5EF4-FFF2-40B4-BE49-F238E27FC236}">
-                <a16:creationId xmlns:a16="http://schemas.microsoft.com/office/drawing/2014/main" id="{81643CBF-4BC9-402D-87CD-920C9EA02021}"/>
+                <a16:creationId xmlns:a16="http://schemas.microsoft.com/office/drawing/2014/main" id="{6A7C4D71-1460-4FC0-85F5-41667CFAEA75}"/>
               </a:ext>
             </a:extLst>
           </p:cNvPr>
@@ -12129,7 +12137,7 @@
           <p:cNvPr id="7" name="">
             <a:extLst xmlns:a="http://schemas.openxmlformats.org/drawingml/2006/main">
               <a:ext uri="{FF2B5EF4-FFF2-40B4-BE49-F238E27FC236}">
-                <a16:creationId xmlns:a16="http://schemas.microsoft.com/office/drawing/2014/main" id="{1457AAD7-7AAF-45E2-9880-B08D73184A99}"/>
+                <a16:creationId xmlns:a16="http://schemas.microsoft.com/office/drawing/2014/main" id="{1250DC72-6F67-4AB3-97D7-D7E7F5D92734}"/>
               </a:ext>
             </a:extLst>
           </p:cNvPr>
@@ -12161,7 +12169,7 @@
           <p:cNvPr id="8" name="">
             <a:extLst xmlns:a="http://schemas.openxmlformats.org/drawingml/2006/main">
               <a:ext uri="{FF2B5EF4-FFF2-40B4-BE49-F238E27FC236}">
-                <a16:creationId xmlns:a16="http://schemas.microsoft.com/office/drawing/2014/main" id="{F9CD1348-968D-4325-838C-771692A38A07}"/>
+                <a16:creationId xmlns:a16="http://schemas.microsoft.com/office/drawing/2014/main" id="{4359D294-A554-47B9-A0F7-0F821C28D50F}"/>
               </a:ext>
             </a:extLst>
           </p:cNvPr>
@@ -12218,7 +12226,7 @@
           <p:cNvPr id="9" name="">
             <a:extLst xmlns:a="http://schemas.openxmlformats.org/drawingml/2006/main">
               <a:ext uri="{FF2B5EF4-FFF2-40B4-BE49-F238E27FC236}">
-                <a16:creationId xmlns:a16="http://schemas.microsoft.com/office/drawing/2014/main" id="{AB9B414F-1AF6-4CCB-9956-4D8AE0BE8B4C}"/>
+                <a16:creationId xmlns:a16="http://schemas.microsoft.com/office/drawing/2014/main" id="{DC2CDEC7-5894-4207-A074-FDBF20965EE1}"/>
               </a:ext>
             </a:extLst>
           </p:cNvPr>
@@ -12275,7 +12283,7 @@
           <p:cNvPr id="10" name="">
             <a:extLst xmlns:a="http://schemas.openxmlformats.org/drawingml/2006/main">
               <a:ext uri="{FF2B5EF4-FFF2-40B4-BE49-F238E27FC236}">
-                <a16:creationId xmlns:a16="http://schemas.microsoft.com/office/drawing/2014/main" id="{22EB929F-104F-4560-B15D-81191CDCCA92}"/>
+                <a16:creationId xmlns:a16="http://schemas.microsoft.com/office/drawing/2014/main" id="{7DF6C053-E126-4118-ABD4-660934D34C3D}"/>
               </a:ext>
             </a:extLst>
           </p:cNvPr>
@@ -12309,7 +12317,7 @@
           <p:cNvPr id="11" name="">
             <a:extLst xmlns:a="http://schemas.openxmlformats.org/drawingml/2006/main">
               <a:ext uri="{FF2B5EF4-FFF2-40B4-BE49-F238E27FC236}">
-                <a16:creationId xmlns:a16="http://schemas.microsoft.com/office/drawing/2014/main" id="{81D35515-ABDC-43FC-A268-DC6AA8147061}"/>
+                <a16:creationId xmlns:a16="http://schemas.microsoft.com/office/drawing/2014/main" id="{929DF2C3-9CF2-423A-9B32-1AC44141EAE1}"/>
               </a:ext>
             </a:extLst>
           </p:cNvPr>
@@ -12341,7 +12349,7 @@
           <p:cNvPr id="12" name="">
             <a:extLst xmlns:a="http://schemas.openxmlformats.org/drawingml/2006/main">
               <a:ext uri="{FF2B5EF4-FFF2-40B4-BE49-F238E27FC236}">
-                <a16:creationId xmlns:a16="http://schemas.microsoft.com/office/drawing/2014/main" id="{F225EE88-6AE6-459A-9042-FA7785132C01}"/>
+                <a16:creationId xmlns:a16="http://schemas.microsoft.com/office/drawing/2014/main" id="{2EF0D737-6F68-4D86-84AB-724A3456B101}"/>
               </a:ext>
             </a:extLst>
           </p:cNvPr>
@@ -12398,7 +12406,7 @@
           <p:cNvPr id="13" name="">
             <a:extLst xmlns:a="http://schemas.openxmlformats.org/drawingml/2006/main">
               <a:ext uri="{FF2B5EF4-FFF2-40B4-BE49-F238E27FC236}">
-                <a16:creationId xmlns:a16="http://schemas.microsoft.com/office/drawing/2014/main" id="{0FD7A0C4-45F5-4D04-A415-FAD7E2A1BC74}"/>
+                <a16:creationId xmlns:a16="http://schemas.microsoft.com/office/drawing/2014/main" id="{B9E7BD8D-7C37-410A-8FAA-51AB11837DE2}"/>
               </a:ext>
             </a:extLst>
           </p:cNvPr>
@@ -12455,7 +12463,7 @@
           <p:cNvPr id="14" name="">
             <a:extLst xmlns:a="http://schemas.openxmlformats.org/drawingml/2006/main">
               <a:ext uri="{FF2B5EF4-FFF2-40B4-BE49-F238E27FC236}">
-                <a16:creationId xmlns:a16="http://schemas.microsoft.com/office/drawing/2014/main" id="{E692416C-7CFE-46A3-B9CA-0D969B19DA5B}"/>
+                <a16:creationId xmlns:a16="http://schemas.microsoft.com/office/drawing/2014/main" id="{78BF29B5-B839-42EE-B5DC-404650833077}"/>
               </a:ext>
             </a:extLst>
           </p:cNvPr>
@@ -12489,7 +12497,7 @@
           <p:cNvPr id="15" name="">
             <a:extLst xmlns:a="http://schemas.openxmlformats.org/drawingml/2006/main">
               <a:ext uri="{FF2B5EF4-FFF2-40B4-BE49-F238E27FC236}">
-                <a16:creationId xmlns:a16="http://schemas.microsoft.com/office/drawing/2014/main" id="{5E921866-9278-477F-BEC5-8729A777A378}"/>
+                <a16:creationId xmlns:a16="http://schemas.microsoft.com/office/drawing/2014/main" id="{00F9C89A-3E02-4674-B190-00F2C28E4789}"/>
               </a:ext>
             </a:extLst>
           </p:cNvPr>
@@ -12521,7 +12529,7 @@
           <p:cNvPr id="16" name="">
             <a:extLst xmlns:a="http://schemas.openxmlformats.org/drawingml/2006/main">
               <a:ext uri="{FF2B5EF4-FFF2-40B4-BE49-F238E27FC236}">
-                <a16:creationId xmlns:a16="http://schemas.microsoft.com/office/drawing/2014/main" id="{28EF2980-F275-40EA-BBB4-22D3E417F4CC}"/>
+                <a16:creationId xmlns:a16="http://schemas.microsoft.com/office/drawing/2014/main" id="{0E40841E-31FD-49E6-BD15-12D3F7765162}"/>
               </a:ext>
             </a:extLst>
           </p:cNvPr>
@@ -12578,7 +12586,7 @@
           <p:cNvPr id="17" name="">
             <a:extLst xmlns:a="http://schemas.openxmlformats.org/drawingml/2006/main">
               <a:ext uri="{FF2B5EF4-FFF2-40B4-BE49-F238E27FC236}">
-                <a16:creationId xmlns:a16="http://schemas.microsoft.com/office/drawing/2014/main" id="{C7FB9AF5-ADF3-4483-B179-C0B6AA30ECED}"/>
+                <a16:creationId xmlns:a16="http://schemas.microsoft.com/office/drawing/2014/main" id="{E1CA8C92-A793-4DA4-9DB1-B4AF64BE11E0}"/>
               </a:ext>
             </a:extLst>
           </p:cNvPr>
@@ -12635,7 +12643,7 @@
           <p:cNvPr id="18" name="">
             <a:extLst xmlns:a="http://schemas.openxmlformats.org/drawingml/2006/main">
               <a:ext uri="{FF2B5EF4-FFF2-40B4-BE49-F238E27FC236}">
-                <a16:creationId xmlns:a16="http://schemas.microsoft.com/office/drawing/2014/main" id="{DD0B6481-612A-4DC4-8DCC-FF1F7390F840}"/>
+                <a16:creationId xmlns:a16="http://schemas.microsoft.com/office/drawing/2014/main" id="{AB5EF1DB-054B-46AB-9A96-FE53B35D1F46}"/>
               </a:ext>
             </a:extLst>
           </p:cNvPr>
@@ -12669,7 +12677,7 @@
           <p:cNvPr id="19" name="">
             <a:extLst xmlns:a="http://schemas.openxmlformats.org/drawingml/2006/main">
               <a:ext uri="{FF2B5EF4-FFF2-40B4-BE49-F238E27FC236}">
-                <a16:creationId xmlns:a16="http://schemas.microsoft.com/office/drawing/2014/main" id="{B5C30CDB-1281-4194-83AE-D3439B9950FE}"/>
+                <a16:creationId xmlns:a16="http://schemas.microsoft.com/office/drawing/2014/main" id="{AD8995DB-97FA-476D-9387-9B8260593B6F}"/>
               </a:ext>
             </a:extLst>
           </p:cNvPr>
@@ -12701,7 +12709,7 @@
           <p:cNvPr id="20" name="">
             <a:extLst xmlns:a="http://schemas.openxmlformats.org/drawingml/2006/main">
               <a:ext uri="{FF2B5EF4-FFF2-40B4-BE49-F238E27FC236}">
-                <a16:creationId xmlns:a16="http://schemas.microsoft.com/office/drawing/2014/main" id="{919E6300-631B-40F5-B3DE-6F6051A5A83C}"/>
+                <a16:creationId xmlns:a16="http://schemas.microsoft.com/office/drawing/2014/main" id="{84ADAE86-F866-49AA-8B2A-96678A0C8821}"/>
               </a:ext>
             </a:extLst>
           </p:cNvPr>
@@ -12758,7 +12766,7 @@
           <p:cNvPr id="21" name="">
             <a:extLst xmlns:a="http://schemas.openxmlformats.org/drawingml/2006/main">
               <a:ext uri="{FF2B5EF4-FFF2-40B4-BE49-F238E27FC236}">
-                <a16:creationId xmlns:a16="http://schemas.microsoft.com/office/drawing/2014/main" id="{02E55057-22CE-4CFF-978C-AA17A3FE14E7}"/>
+                <a16:creationId xmlns:a16="http://schemas.microsoft.com/office/drawing/2014/main" id="{0A563417-6EDF-4016-B33C-0D5600CECC6C}"/>
               </a:ext>
             </a:extLst>
           </p:cNvPr>
@@ -12815,7 +12823,7 @@
           <p:cNvPr id="22" name="">
             <a:extLst xmlns:a="http://schemas.openxmlformats.org/drawingml/2006/main">
               <a:ext uri="{FF2B5EF4-FFF2-40B4-BE49-F238E27FC236}">
-                <a16:creationId xmlns:a16="http://schemas.microsoft.com/office/drawing/2014/main" id="{56826300-DC35-4159-83C5-53BA37C7E816}"/>
+                <a16:creationId xmlns:a16="http://schemas.microsoft.com/office/drawing/2014/main" id="{3CACD587-418F-4F2B-88E1-8CF810EB087B}"/>
               </a:ext>
             </a:extLst>
           </p:cNvPr>
@@ -12870,7 +12878,7 @@
     </p:spTree>
     <p:extLst>
       <p:ext uri="{BB962C8B-B14F-4D97-AF65-F5344CB8AC3E}">
-        <p14:creationId xmlns:p14="http://schemas.microsoft.com/office/powerpoint/2010/main" val="790472554"/>
+        <p14:creationId xmlns:p14="http://schemas.microsoft.com/office/powerpoint/2010/main" val="1650068013"/>
       </p:ext>
     </p:extLst>
   </p:cSld>
@@ -13071,7 +13079,7 @@
           <p:cNvPr id="22" name="">
             <a:extLst xmlns:a="http://schemas.openxmlformats.org/drawingml/2006/main">
               <a:ext uri="{FF2B5EF4-FFF2-40B4-BE49-F238E27FC236}">
-                <a16:creationId xmlns:a16="http://schemas.microsoft.com/office/drawing/2014/main" id="{38C71750-374E-444B-AA8C-9B0A73C87AA7}"/>
+                <a16:creationId xmlns:a16="http://schemas.microsoft.com/office/drawing/2014/main" id="{54CB6E73-335E-4952-B13C-7FCED5FFC945}"/>
               </a:ext>
             </a:extLst>
           </p:cNvPr>
@@ -13103,7 +13111,7 @@
           <p:cNvPr id="2" name="">
             <a:extLst xmlns:a="http://schemas.openxmlformats.org/drawingml/2006/main">
               <a:ext uri="{FF2B5EF4-FFF2-40B4-BE49-F238E27FC236}">
-                <a16:creationId xmlns:a16="http://schemas.microsoft.com/office/drawing/2014/main" id="{183CC104-095F-4EDA-BD34-F645646EF252}"/>
+                <a16:creationId xmlns:a16="http://schemas.microsoft.com/office/drawing/2014/main" id="{D255BB6A-B68E-40A4-B75C-D19C2AA29775}"/>
               </a:ext>
             </a:extLst>
           </p:cNvPr>
@@ -13160,7 +13168,7 @@
           <p:cNvPr id="3" name="">
             <a:extLst xmlns:a="http://schemas.openxmlformats.org/drawingml/2006/main">
               <a:ext uri="{FF2B5EF4-FFF2-40B4-BE49-F238E27FC236}">
-                <a16:creationId xmlns:a16="http://schemas.microsoft.com/office/drawing/2014/main" id="{7A0AF70F-D917-4D95-A1D6-695D9C1AFC82}"/>
+                <a16:creationId xmlns:a16="http://schemas.microsoft.com/office/drawing/2014/main" id="{74FE788C-9FE5-4304-93E7-A29D3C2DB506}"/>
               </a:ext>
             </a:extLst>
           </p:cNvPr>
@@ -13192,7 +13200,7 @@
           <p:cNvPr id="4" name="">
             <a:extLst xmlns:a="http://schemas.openxmlformats.org/drawingml/2006/main">
               <a:ext uri="{FF2B5EF4-FFF2-40B4-BE49-F238E27FC236}">
-                <a16:creationId xmlns:a16="http://schemas.microsoft.com/office/drawing/2014/main" id="{4D3FD937-AC49-4A84-A035-B2572379F434}"/>
+                <a16:creationId xmlns:a16="http://schemas.microsoft.com/office/drawing/2014/main" id="{B09E3277-384D-469F-AC2C-80960AC84384}"/>
               </a:ext>
             </a:extLst>
           </p:cNvPr>
@@ -13249,7 +13257,7 @@
           <p:cNvPr id="5" name="">
             <a:extLst xmlns:a="http://schemas.openxmlformats.org/drawingml/2006/main">
               <a:ext uri="{FF2B5EF4-FFF2-40B4-BE49-F238E27FC236}">
-                <a16:creationId xmlns:a16="http://schemas.microsoft.com/office/drawing/2014/main" id="{703E856E-B035-47EF-A2F1-30055ACF7334}"/>
+                <a16:creationId xmlns:a16="http://schemas.microsoft.com/office/drawing/2014/main" id="{A6303EDF-1977-4556-9FB1-2F46B3DCF362}"/>
               </a:ext>
             </a:extLst>
           </p:cNvPr>
@@ -13306,7 +13314,7 @@
           <p:cNvPr id="6" name="">
             <a:extLst xmlns:a="http://schemas.openxmlformats.org/drawingml/2006/main">
               <a:ext uri="{FF2B5EF4-FFF2-40B4-BE49-F238E27FC236}">
-                <a16:creationId xmlns:a16="http://schemas.microsoft.com/office/drawing/2014/main" id="{2D5FE1A4-1C2F-4B1A-B9A0-5C6C89939F73}"/>
+                <a16:creationId xmlns:a16="http://schemas.microsoft.com/office/drawing/2014/main" id="{F4AD85CB-A54F-4643-AB31-F32E75E46F88}"/>
               </a:ext>
             </a:extLst>
           </p:cNvPr>
@@ -13363,7 +13371,7 @@
           <p:cNvPr id="7" name="">
             <a:extLst xmlns:a="http://schemas.openxmlformats.org/drawingml/2006/main">
               <a:ext uri="{FF2B5EF4-FFF2-40B4-BE49-F238E27FC236}">
-                <a16:creationId xmlns:a16="http://schemas.microsoft.com/office/drawing/2014/main" id="{6246D4D4-445F-4041-9E52-0466F074C802}"/>
+                <a16:creationId xmlns:a16="http://schemas.microsoft.com/office/drawing/2014/main" id="{A6F30295-970C-4AD0-8394-EF4AB3E03593}"/>
               </a:ext>
             </a:extLst>
           </p:cNvPr>
@@ -13395,7 +13403,7 @@
           <p:cNvPr id="8" name="">
             <a:extLst xmlns:a="http://schemas.openxmlformats.org/drawingml/2006/main">
               <a:ext uri="{FF2B5EF4-FFF2-40B4-BE49-F238E27FC236}">
-                <a16:creationId xmlns:a16="http://schemas.microsoft.com/office/drawing/2014/main" id="{44376E00-571E-40DC-B867-AC62FDF93209}"/>
+                <a16:creationId xmlns:a16="http://schemas.microsoft.com/office/drawing/2014/main" id="{6BC3A556-3CFC-4531-91A1-D42C6F75B9AB}"/>
               </a:ext>
             </a:extLst>
           </p:cNvPr>
@@ -13452,7 +13460,7 @@
           <p:cNvPr id="9" name="">
             <a:extLst xmlns:a="http://schemas.openxmlformats.org/drawingml/2006/main">
               <a:ext uri="{FF2B5EF4-FFF2-40B4-BE49-F238E27FC236}">
-                <a16:creationId xmlns:a16="http://schemas.microsoft.com/office/drawing/2014/main" id="{EC270F1C-E84F-404F-92B4-B49C45ED6199}"/>
+                <a16:creationId xmlns:a16="http://schemas.microsoft.com/office/drawing/2014/main" id="{147D610E-C3E9-45EA-B009-1B7E40C9BADB}"/>
               </a:ext>
             </a:extLst>
           </p:cNvPr>
@@ -13509,7 +13517,7 @@
           <p:cNvPr id="10" name="">
             <a:extLst xmlns:a="http://schemas.openxmlformats.org/drawingml/2006/main">
               <a:ext uri="{FF2B5EF4-FFF2-40B4-BE49-F238E27FC236}">
-                <a16:creationId xmlns:a16="http://schemas.microsoft.com/office/drawing/2014/main" id="{EA1312EF-453E-4CF1-85BD-756C1F8D5CB5}"/>
+                <a16:creationId xmlns:a16="http://schemas.microsoft.com/office/drawing/2014/main" id="{7D06A40C-3E3F-4BB0-8FB8-B9DF387ABF6D}"/>
               </a:ext>
             </a:extLst>
           </p:cNvPr>
@@ -13543,7 +13551,7 @@
           <p:cNvPr id="11" name="">
             <a:extLst xmlns:a="http://schemas.openxmlformats.org/drawingml/2006/main">
               <a:ext uri="{FF2B5EF4-FFF2-40B4-BE49-F238E27FC236}">
-                <a16:creationId xmlns:a16="http://schemas.microsoft.com/office/drawing/2014/main" id="{1C06B09A-D206-4C9F-B9C8-A916A7C6DEA3}"/>
+                <a16:creationId xmlns:a16="http://schemas.microsoft.com/office/drawing/2014/main" id="{A793D3A9-E041-414B-9CDD-E95BFA49DA03}"/>
               </a:ext>
             </a:extLst>
           </p:cNvPr>
@@ -13575,7 +13583,7 @@
           <p:cNvPr id="12" name="">
             <a:extLst xmlns:a="http://schemas.openxmlformats.org/drawingml/2006/main">
               <a:ext uri="{FF2B5EF4-FFF2-40B4-BE49-F238E27FC236}">
-                <a16:creationId xmlns:a16="http://schemas.microsoft.com/office/drawing/2014/main" id="{C5FF834A-C7DE-4ED1-96B6-D89C53496F02}"/>
+                <a16:creationId xmlns:a16="http://schemas.microsoft.com/office/drawing/2014/main" id="{04B0AACC-3430-4081-956D-FA479DC7A557}"/>
               </a:ext>
             </a:extLst>
           </p:cNvPr>
@@ -13632,7 +13640,7 @@
           <p:cNvPr id="13" name="">
             <a:extLst xmlns:a="http://schemas.openxmlformats.org/drawingml/2006/main">
               <a:ext uri="{FF2B5EF4-FFF2-40B4-BE49-F238E27FC236}">
-                <a16:creationId xmlns:a16="http://schemas.microsoft.com/office/drawing/2014/main" id="{C0543A87-6C99-4EA7-ACBF-990758834E0F}"/>
+                <a16:creationId xmlns:a16="http://schemas.microsoft.com/office/drawing/2014/main" id="{E5100AA0-4A52-478A-9D03-B56D9E022718}"/>
               </a:ext>
             </a:extLst>
           </p:cNvPr>
@@ -13689,7 +13697,7 @@
           <p:cNvPr id="14" name="">
             <a:extLst xmlns:a="http://schemas.openxmlformats.org/drawingml/2006/main">
               <a:ext uri="{FF2B5EF4-FFF2-40B4-BE49-F238E27FC236}">
-                <a16:creationId xmlns:a16="http://schemas.microsoft.com/office/drawing/2014/main" id="{DFBD21A3-616D-4490-946F-7F793769AC50}"/>
+                <a16:creationId xmlns:a16="http://schemas.microsoft.com/office/drawing/2014/main" id="{EF6563D3-A1B5-4E0F-A714-82B26006F431}"/>
               </a:ext>
             </a:extLst>
           </p:cNvPr>
@@ -13723,7 +13731,7 @@
           <p:cNvPr id="15" name="">
             <a:extLst xmlns:a="http://schemas.openxmlformats.org/drawingml/2006/main">
               <a:ext uri="{FF2B5EF4-FFF2-40B4-BE49-F238E27FC236}">
-                <a16:creationId xmlns:a16="http://schemas.microsoft.com/office/drawing/2014/main" id="{7477F739-E603-45CB-B0A8-8DEEBB4AEADF}"/>
+                <a16:creationId xmlns:a16="http://schemas.microsoft.com/office/drawing/2014/main" id="{7428E866-B265-4DCF-9301-9428F1A200A2}"/>
               </a:ext>
             </a:extLst>
           </p:cNvPr>
@@ -13755,7 +13763,7 @@
           <p:cNvPr id="16" name="">
             <a:extLst xmlns:a="http://schemas.openxmlformats.org/drawingml/2006/main">
               <a:ext uri="{FF2B5EF4-FFF2-40B4-BE49-F238E27FC236}">
-                <a16:creationId xmlns:a16="http://schemas.microsoft.com/office/drawing/2014/main" id="{0790166B-B3AA-4E99-8A49-65D1880FAF5D}"/>
+                <a16:creationId xmlns:a16="http://schemas.microsoft.com/office/drawing/2014/main" id="{2DC58498-AB8D-4010-9F7D-5320367D9CA2}"/>
               </a:ext>
             </a:extLst>
           </p:cNvPr>
@@ -13812,7 +13820,7 @@
           <p:cNvPr id="17" name="">
             <a:extLst xmlns:a="http://schemas.openxmlformats.org/drawingml/2006/main">
               <a:ext uri="{FF2B5EF4-FFF2-40B4-BE49-F238E27FC236}">
-                <a16:creationId xmlns:a16="http://schemas.microsoft.com/office/drawing/2014/main" id="{1E3CF296-0C5A-480A-8465-91FABC4B8CF2}"/>
+                <a16:creationId xmlns:a16="http://schemas.microsoft.com/office/drawing/2014/main" id="{171F423D-3818-4D4A-83BE-5CA79F540E6B}"/>
               </a:ext>
             </a:extLst>
           </p:cNvPr>
@@ -13869,7 +13877,7 @@
           <p:cNvPr id="18" name="">
             <a:extLst xmlns:a="http://schemas.openxmlformats.org/drawingml/2006/main">
               <a:ext uri="{FF2B5EF4-FFF2-40B4-BE49-F238E27FC236}">
-                <a16:creationId xmlns:a16="http://schemas.microsoft.com/office/drawing/2014/main" id="{700848E1-0474-4132-8759-6E16F8C73881}"/>
+                <a16:creationId xmlns:a16="http://schemas.microsoft.com/office/drawing/2014/main" id="{A1725A3B-86F5-4588-A47E-28D9AAD534F7}"/>
               </a:ext>
             </a:extLst>
           </p:cNvPr>
@@ -13903,7 +13911,7 @@
           <p:cNvPr id="19" name="">
             <a:extLst xmlns:a="http://schemas.openxmlformats.org/drawingml/2006/main">
               <a:ext uri="{FF2B5EF4-FFF2-40B4-BE49-F238E27FC236}">
-                <a16:creationId xmlns:a16="http://schemas.microsoft.com/office/drawing/2014/main" id="{898A85A5-05B0-4468-84B2-BAD42E444745}"/>
+                <a16:creationId xmlns:a16="http://schemas.microsoft.com/office/drawing/2014/main" id="{79CFF010-2D88-42E7-A9DD-A3847F6D9FE8}"/>
               </a:ext>
             </a:extLst>
           </p:cNvPr>
@@ -13935,7 +13943,7 @@
           <p:cNvPr id="20" name="">
             <a:extLst xmlns:a="http://schemas.openxmlformats.org/drawingml/2006/main">
               <a:ext uri="{FF2B5EF4-FFF2-40B4-BE49-F238E27FC236}">
-                <a16:creationId xmlns:a16="http://schemas.microsoft.com/office/drawing/2014/main" id="{758387DB-5EBB-4CEF-A054-9108FCE6D404}"/>
+                <a16:creationId xmlns:a16="http://schemas.microsoft.com/office/drawing/2014/main" id="{8C7C2468-D16A-4DCC-8B3B-D57AFBBFA486}"/>
               </a:ext>
             </a:extLst>
           </p:cNvPr>
@@ -13992,7 +14000,7 @@
           <p:cNvPr id="21" name="">
             <a:extLst xmlns:a="http://schemas.openxmlformats.org/drawingml/2006/main">
               <a:ext uri="{FF2B5EF4-FFF2-40B4-BE49-F238E27FC236}">
-                <a16:creationId xmlns:a16="http://schemas.microsoft.com/office/drawing/2014/main" id="{5F09C9C1-9E7F-40C9-A33F-13988DC12885}"/>
+                <a16:creationId xmlns:a16="http://schemas.microsoft.com/office/drawing/2014/main" id="{C5B313FF-4427-48C5-9308-BDEA86D6053A}"/>
               </a:ext>
             </a:extLst>
           </p:cNvPr>
@@ -14047,7 +14055,7 @@
     </p:spTree>
     <p:extLst>
       <p:ext uri="{BB962C8B-B14F-4D97-AF65-F5344CB8AC3E}">
-        <p14:creationId xmlns:p14="http://schemas.microsoft.com/office/powerpoint/2010/main" val="1160961480"/>
+        <p14:creationId xmlns:p14="http://schemas.microsoft.com/office/powerpoint/2010/main" val="31858450"/>
       </p:ext>
     </p:extLst>
   </p:cSld>
